--- a/exports/pptx/lessons/senior-module-13-indic-ecology/day-03-rivers-as-sacred.pptx
+++ b/exports/pptx/lessons/senior-module-13-indic-ecology/day-03-rivers-as-sacred.pptx
@@ -3626,7 +3626,7 @@
         <p:spPr>
           <a:xfrm>
             <a:off x="634901" y="883593"/>
-            <a:ext cx="8102798" cy="1462683"/>
+            <a:ext cx="8102798" cy="487561"/>
           </a:xfrm>
           <a:prstGeom prst="rect">
             <a:avLst/>
@@ -3657,7 +3657,7 @@
                 <a:ea typeface="Georgia" pitchFamily="34" charset="-122"/>
                 <a:cs typeface="Georgia" pitchFamily="34" charset="-120"/>
               </a:rPr>
-              <a:t>State the observable phenomenon first.</a:t>
+              <a:t>The Indian river tradition.</a:t>
             </a:r>
             <a:pPr algn="l" indent="0" marL="0">
               <a:lnSpc>
@@ -3677,10 +3677,72 @@
                 <a:ea typeface="Georgia" pitchFamily="34" charset="-122"/>
                 <a:cs typeface="Georgia" pitchFamily="34" charset="-120"/>
               </a:rPr>
-              <a:t> Whatever the day's idea is — a number trick, a celestial pattern, a herb's identifying feature — start with the thing students can see, hear, or do.</a:t>
+              <a:t> </a:t>
+            </a:r>
+            <a:pPr algn="l" indent="0" marL="0">
+              <a:lnSpc>
+                <a:spcPts val="1620"/>
+              </a:lnSpc>
+              <a:spcAft>
+                <a:spcPts val="300"/>
+              </a:spcAft>
+              <a:buNone/>
+            </a:pPr>
+            <a:r>
+              <a:rPr lang="en-US" sz="1200" i="1" dirty="0">
+                <a:solidFill>
+                  <a:srgbClr val="1A1A1A"/>
+                </a:solidFill>
+                <a:latin typeface="Georgia" pitchFamily="34" charset="0"/>
+                <a:ea typeface="Georgia" pitchFamily="34" charset="-122"/>
+                <a:cs typeface="Georgia" pitchFamily="34" charset="-120"/>
+              </a:rPr>
+              <a:t>Gaṅgā, Yamunā, Sarasvatī, Narmadā, Kāverī, Godāvarī, Sindhu</a:t>
+            </a:r>
+            <a:pPr algn="l" indent="0" marL="0">
+              <a:lnSpc>
+                <a:spcPts val="1620"/>
+              </a:lnSpc>
+              <a:spcAft>
+                <a:spcPts val="300"/>
+              </a:spcAft>
+              <a:buNone/>
+            </a:pPr>
+            <a:r>
+              <a:rPr lang="en-US" sz="1200" dirty="0">
+                <a:solidFill>
+                  <a:srgbClr val="1A1A1A"/>
+                </a:solidFill>
+                <a:latin typeface="Georgia" pitchFamily="34" charset="0"/>
+                <a:ea typeface="Georgia" pitchFamily="34" charset="-122"/>
+                <a:cs typeface="Georgia" pitchFamily="34" charset="-120"/>
+              </a:rPr>
+              <a:t> — seven sacred rivers in Hindu tradition. Each has festival cycles, pilgrimage routes, ritual practices.</a:t>
             </a:r>
             <a:endParaRPr lang="en-US" sz="1200" dirty="0"/>
           </a:p>
+        </p:txBody>
+      </p:sp>
+      <p:sp>
+        <p:nvSpPr>
+          <p:cNvPr id="5" name="Text 3"/>
+          <p:cNvSpPr/>
+          <p:nvPr/>
+        </p:nvSpPr>
+        <p:spPr>
+          <a:xfrm>
+            <a:off x="634901" y="1472654"/>
+            <a:ext cx="8102798" cy="693241"/>
+          </a:xfrm>
+          <a:prstGeom prst="rect">
+            <a:avLst/>
+          </a:prstGeom>
+          <a:noFill/>
+          <a:ln/>
+        </p:spPr>
+        <p:txBody>
+          <a:bodyPr wrap="square" lIns="0" tIns="0" rIns="0" bIns="0" rtlCol="0" anchor="t"/>
+          <a:lstStyle/>
           <a:p>
             <a:pPr algn="l" marL="342900" indent="-342900">
               <a:lnSpc>
@@ -3701,7 +3763,7 @@
                 <a:ea typeface="Georgia" pitchFamily="34" charset="-122"/>
                 <a:cs typeface="Georgia" pitchFamily="34" charset="-120"/>
               </a:rPr>
-              <a:t>Introduce the Sanskrit term.</a:t>
+              <a:t>The ecological function of sacredness.</a:t>
             </a:r>
             <a:pPr algn="l" indent="0" marL="0">
               <a:lnSpc>
@@ -3721,10 +3783,72 @@
                 <a:ea typeface="Georgia" pitchFamily="34" charset="-122"/>
                 <a:cs typeface="Georgia" pitchFamily="34" charset="-120"/>
               </a:rPr>
-              <a:t> Once, in the triple format, then italicised only.</a:t>
+              <a:t> Treating a river as sacred → norms against pollution, against blocking the flow, against over-extraction. </a:t>
+            </a:r>
+            <a:pPr algn="l" indent="0" marL="0">
+              <a:lnSpc>
+                <a:spcPts val="1620"/>
+              </a:lnSpc>
+              <a:spcAft>
+                <a:spcPts val="300"/>
+              </a:spcAft>
+              <a:buNone/>
+            </a:pPr>
+            <a:r>
+              <a:rPr lang="en-US" sz="1200" i="1" dirty="0">
+                <a:solidFill>
+                  <a:srgbClr val="1A1A1A"/>
+                </a:solidFill>
+                <a:latin typeface="Georgia" pitchFamily="34" charset="0"/>
+                <a:ea typeface="Georgia" pitchFamily="34" charset="-122"/>
+                <a:cs typeface="Georgia" pitchFamily="34" charset="-120"/>
+              </a:rPr>
+              <a:t>In principle.</a:t>
+            </a:r>
+            <a:pPr algn="l" indent="0" marL="0">
+              <a:lnSpc>
+                <a:spcPts val="1620"/>
+              </a:lnSpc>
+              <a:spcAft>
+                <a:spcPts val="300"/>
+              </a:spcAft>
+              <a:buNone/>
+            </a:pPr>
+            <a:r>
+              <a:rPr lang="en-US" sz="1200" dirty="0">
+                <a:solidFill>
+                  <a:srgbClr val="1A1A1A"/>
+                </a:solidFill>
+                <a:latin typeface="Georgia" pitchFamily="34" charset="0"/>
+                <a:ea typeface="Georgia" pitchFamily="34" charset="-122"/>
+                <a:cs typeface="Georgia" pitchFamily="34" charset="-120"/>
+              </a:rPr>
+              <a:t> These norms are NOT always honoured today (Ganga, Yamuna are heavily polluted).</a:t>
             </a:r>
             <a:endParaRPr lang="en-US" sz="1200" dirty="0"/>
           </a:p>
+        </p:txBody>
+      </p:sp>
+      <p:sp>
+        <p:nvSpPr>
+          <p:cNvPr id="6" name="Text 4"/>
+          <p:cNvSpPr/>
+          <p:nvPr/>
+        </p:nvSpPr>
+        <p:spPr>
+          <a:xfrm>
+            <a:off x="634901" y="2267396"/>
+            <a:ext cx="8102798" cy="693241"/>
+          </a:xfrm>
+          <a:prstGeom prst="rect">
+            <a:avLst/>
+          </a:prstGeom>
+          <a:noFill/>
+          <a:ln/>
+        </p:spPr>
+        <p:txBody>
+          <a:bodyPr wrap="square" lIns="0" tIns="0" rIns="0" bIns="0" rtlCol="0" anchor="t"/>
+          <a:lstStyle/>
           <a:p>
             <a:pPr algn="l" marL="342900" indent="-342900">
               <a:lnSpc>
@@ -3745,7 +3869,7 @@
                 <a:ea typeface="Georgia" pitchFamily="34" charset="-122"/>
                 <a:cs typeface="Georgia" pitchFamily="34" charset="-120"/>
               </a:rPr>
-              <a:t>Build the conceptual map.</a:t>
+              <a:t>Modern parallel.</a:t>
             </a:r>
             <a:pPr algn="l" indent="0" marL="0">
               <a:lnSpc>
@@ -3765,10 +3889,32 @@
                 <a:ea typeface="Georgia" pitchFamily="34" charset="-122"/>
                 <a:cs typeface="Georgia" pitchFamily="34" charset="-120"/>
               </a:rPr>
-              <a:t> Connect today's idea to prior modules (especially Module 2 if applicable) and prior days.</a:t>
+              <a:t> Ecuador and Bolivia have laws giving rivers legal personhood. Aotearoa/New Zealand granted legal personhood to the Whanganui River in 2017. India's Ganga and Yamuna were granted similar status briefly in 2017 (court ruling overturned). The legal innovation echoes the older sacred-river framing.</a:t>
             </a:r>
             <a:endParaRPr lang="en-US" sz="1200" dirty="0"/>
           </a:p>
+        </p:txBody>
+      </p:sp>
+      <p:sp>
+        <p:nvSpPr>
+          <p:cNvPr id="7" name="Text 5"/>
+          <p:cNvSpPr/>
+          <p:nvPr/>
+        </p:nvSpPr>
+        <p:spPr>
+          <a:xfrm>
+            <a:off x="634901" y="3062139"/>
+            <a:ext cx="8102798" cy="487561"/>
+          </a:xfrm>
+          <a:prstGeom prst="rect">
+            <a:avLst/>
+          </a:prstGeom>
+          <a:noFill/>
+          <a:ln/>
+        </p:spPr>
+        <p:txBody>
+          <a:bodyPr wrap="square" lIns="0" tIns="0" rIns="0" bIns="0" rtlCol="0" anchor="t"/>
+          <a:lstStyle/>
           <a:p>
             <a:pPr algn="l" marL="342900" indent="-342900">
               <a:lnSpc>
@@ -3789,7 +3935,7 @@
                 <a:ea typeface="Georgia" pitchFamily="34" charset="-122"/>
                 <a:cs typeface="Georgia" pitchFamily="34" charset="-120"/>
               </a:rPr>
-              <a:t>Work an example</a:t>
+              <a:t>Source.</a:t>
             </a:r>
             <a:pPr algn="l" indent="0" marL="0">
               <a:lnSpc>
@@ -3809,10 +3955,72 @@
                 <a:ea typeface="Georgia" pitchFamily="34" charset="-122"/>
                 <a:cs typeface="Georgia" pitchFamily="34" charset="-120"/>
               </a:rPr>
-              <a:t> with the whole class on the board.</a:t>
+              <a:t> Atharva Veda Pṛthivī Sūkta 12.1 — multiple references to flowing waters. Vedic hymns to </a:t>
+            </a:r>
+            <a:pPr algn="l" indent="0" marL="0">
+              <a:lnSpc>
+                <a:spcPts val="1620"/>
+              </a:lnSpc>
+              <a:spcAft>
+                <a:spcPts val="300"/>
+              </a:spcAft>
+              <a:buNone/>
+            </a:pPr>
+            <a:r>
+              <a:rPr lang="en-US" sz="1200" i="1" dirty="0">
+                <a:solidFill>
+                  <a:srgbClr val="1A1A1A"/>
+                </a:solidFill>
+                <a:latin typeface="Georgia" pitchFamily="34" charset="0"/>
+                <a:ea typeface="Georgia" pitchFamily="34" charset="-122"/>
+                <a:cs typeface="Georgia" pitchFamily="34" charset="-120"/>
+              </a:rPr>
+              <a:t>āpaḥ</a:t>
+            </a:r>
+            <a:pPr algn="l" indent="0" marL="0">
+              <a:lnSpc>
+                <a:spcPts val="1620"/>
+              </a:lnSpc>
+              <a:spcAft>
+                <a:spcPts val="300"/>
+              </a:spcAft>
+              <a:buNone/>
+            </a:pPr>
+            <a:r>
+              <a:rPr lang="en-US" sz="1200" dirty="0">
+                <a:solidFill>
+                  <a:srgbClr val="1A1A1A"/>
+                </a:solidFill>
+                <a:latin typeface="Georgia" pitchFamily="34" charset="0"/>
+                <a:ea typeface="Georgia" pitchFamily="34" charset="-122"/>
+                <a:cs typeface="Georgia" pitchFamily="34" charset="-120"/>
+              </a:rPr>
+              <a:t> (waters). Bhāgavata Purāṇa discusses the seven rivers.</a:t>
             </a:r>
             <a:endParaRPr lang="en-US" sz="1200" dirty="0"/>
           </a:p>
+        </p:txBody>
+      </p:sp>
+      <p:sp>
+        <p:nvSpPr>
+          <p:cNvPr id="8" name="Text 6"/>
+          <p:cNvSpPr/>
+          <p:nvPr/>
+        </p:nvSpPr>
+        <p:spPr>
+          <a:xfrm>
+            <a:off x="634901" y="3651200"/>
+            <a:ext cx="8102798" cy="487561"/>
+          </a:xfrm>
+          <a:prstGeom prst="rect">
+            <a:avLst/>
+          </a:prstGeom>
+          <a:noFill/>
+          <a:ln/>
+        </p:spPr>
+        <p:txBody>
+          <a:bodyPr wrap="square" lIns="0" tIns="0" rIns="0" bIns="0" rtlCol="0" anchor="t"/>
+          <a:lstStyle/>
           <a:p>
             <a:pPr algn="l" marL="342900" indent="-342900">
               <a:lnSpc>
@@ -3833,7 +4041,7 @@
                 <a:ea typeface="Georgia" pitchFamily="34" charset="-122"/>
                 <a:cs typeface="Georgia" pitchFamily="34" charset="-120"/>
               </a:rPr>
-              <a:t>Independent or paired practice</a:t>
+              <a:t>Critical look.</a:t>
             </a:r>
             <a:pPr algn="l" indent="0" marL="0">
               <a:lnSpc>
@@ -3853,7 +4061,27 @@
                 <a:ea typeface="Georgia" pitchFamily="34" charset="-122"/>
                 <a:cs typeface="Georgia" pitchFamily="34" charset="-120"/>
               </a:rPr>
-              <a:t> for ~5 minutes.</a:t>
+              <a:t> </a:t>
+            </a:r>
+            <a:pPr algn="l" indent="0" marL="0">
+              <a:lnSpc>
+                <a:spcPts val="1620"/>
+              </a:lnSpc>
+              <a:spcAft>
+                <a:spcPts val="300"/>
+              </a:spcAft>
+              <a:buNone/>
+            </a:pPr>
+            <a:r>
+              <a:rPr lang="en-US" sz="1200" i="1" dirty="0">
+                <a:solidFill>
+                  <a:srgbClr val="1A1A1A"/>
+                </a:solidFill>
+                <a:latin typeface="Georgia" pitchFamily="34" charset="0"/>
+                <a:ea typeface="Georgia" pitchFamily="34" charset="-122"/>
+                <a:cs typeface="Georgia" pitchFamily="34" charset="-120"/>
+              </a:rPr>
+              <a:t>"Why are sacred-river norms often violated in practice today? What changes in society have weakened the older protections? Can the framework be revived for the climate crisis?"</a:t>
             </a:r>
             <a:endParaRPr lang="en-US" sz="1200" dirty="0"/>
           </a:p>
@@ -3861,7 +4089,7 @@
       </p:sp>
       <p:sp>
         <p:nvSpPr>
-          <p:cNvPr id="5" name="Text 3"/>
+          <p:cNvPr id="9" name="Text 7"/>
           <p:cNvSpPr/>
           <p:nvPr/>
         </p:nvSpPr>

--- a/exports/pptx/lessons/senior-module-13-indic-ecology/day-03-rivers-as-sacred.pptx
+++ b/exports/pptx/lessons/senior-module-13-indic-ecology/day-03-rivers-as-sacred.pptx
@@ -16,9 +16,12 @@
     <p:sldId id="264" r:id="rId10"/>
     <p:sldId id="265" r:id="rId11"/>
     <p:sldId id="266" r:id="rId12"/>
+    <p:sldId id="267" r:id="rId13"/>
+    <p:sldId id="268" r:id="rId14"/>
+    <p:sldId id="269" r:id="rId15"/>
   </p:sldIdLst>
   <p:notesMasterIdLst>
-    <p:notesMasterId r:id="rId13"/>
+    <p:notesMasterId r:id="rId16"/>
   </p:notesMasterIdLst>
   <p:sldSz cx="9144000" cy="5143500"/>
   <p:notesSz cx="5143500" cy="9144000"/>
@@ -712,6 +715,270 @@
             <a:fld id="{F7021451-1387-4CA6-816F-3879F97B5CBC}" type="slidenum">
               <a:rPr lang="en-US"/>
               <a:t>11</a:t>
+            </a:fld>
+            <a:endParaRPr lang="en-US"/>
+          </a:p>
+        </p:txBody>
+      </p:sp>
+    </p:spTree>
+    <p:extLst>
+      <p:ext uri="{BB962C8B-B14F-4D97-AF65-F5344CB8AC3E}">
+        <p14:creationId xmlns:p14="http://schemas.microsoft.com/office/powerpoint/2010/main" val="1024086991"/>
+      </p:ext>
+    </p:extLst>
+  </p:cSld>
+  <p:clrMapOvr>
+    <a:masterClrMapping/>
+  </p:clrMapOvr>
+</p:notes>
+</file>
+
+<file path=ppt/notesSlides/notesSlide12.xml><?xml version="1.0" encoding="utf-8"?>
+<p:notes xmlns:a="http://schemas.openxmlformats.org/drawingml/2006/main" xmlns:r="http://schemas.openxmlformats.org/officeDocument/2006/relationships" xmlns:p="http://schemas.openxmlformats.org/presentationml/2006/main">
+  <p:cSld>
+    <p:spTree>
+      <p:nvGrpSpPr>
+        <p:cNvPr id="1" name=""/>
+        <p:cNvGrpSpPr/>
+        <p:nvPr/>
+      </p:nvGrpSpPr>
+      <p:grpSpPr>
+        <a:xfrm>
+          <a:off x="0" y="0"/>
+          <a:ext cx="0" cy="0"/>
+          <a:chOff x="0" y="0"/>
+          <a:chExt cx="0" cy="0"/>
+        </a:xfrm>
+      </p:grpSpPr>
+      <p:sp>
+        <p:nvSpPr>
+          <p:cNvPr id="2" name="Slide Image Placeholder 1"/>
+          <p:cNvSpPr>
+            <a:spLocks noGrp="1" noRot="1" noChangeAspect="1"/>
+          </p:cNvSpPr>
+          <p:nvPr>
+            <p:ph type="sldImg"/>
+          </p:nvPr>
+        </p:nvSpPr>
+        <p:spPr/>
+      </p:sp>
+      <p:sp>
+        <p:nvSpPr>
+          <p:cNvPr id="3" name="Notes Placeholder 2"/>
+          <p:cNvSpPr>
+            <a:spLocks noGrp="1"/>
+          </p:cNvSpPr>
+          <p:nvPr>
+            <p:ph type="body" idx="1"/>
+          </p:nvPr>
+        </p:nvSpPr>
+        <p:spPr/>
+        <p:txBody>
+          <a:bodyPr/>
+          <a:lstStyle/>
+          <a:p>
+            <a:r>
+              <a:rPr lang="en-US" dirty="0"/>
+              <a:t/>
+            </a:r>
+            <a:endParaRPr lang="en-US" dirty="0"/>
+          </a:p>
+        </p:txBody>
+      </p:sp>
+      <p:sp>
+        <p:nvSpPr>
+          <p:cNvPr id="4" name="Slide Number Placeholder 3"/>
+          <p:cNvSpPr>
+            <a:spLocks noGrp="1"/>
+          </p:cNvSpPr>
+          <p:nvPr>
+            <p:ph type="sldNum" sz="quarter" idx="10"/>
+          </p:nvPr>
+        </p:nvSpPr>
+        <p:spPr/>
+        <p:txBody>
+          <a:bodyPr/>
+          <a:lstStyle/>
+          <a:p>
+            <a:fld id="{F7021451-1387-4CA6-816F-3879F97B5CBC}" type="slidenum">
+              <a:rPr lang="en-US"/>
+              <a:t>12</a:t>
+            </a:fld>
+            <a:endParaRPr lang="en-US"/>
+          </a:p>
+        </p:txBody>
+      </p:sp>
+    </p:spTree>
+    <p:extLst>
+      <p:ext uri="{BB962C8B-B14F-4D97-AF65-F5344CB8AC3E}">
+        <p14:creationId xmlns:p14="http://schemas.microsoft.com/office/powerpoint/2010/main" val="1024086991"/>
+      </p:ext>
+    </p:extLst>
+  </p:cSld>
+  <p:clrMapOvr>
+    <a:masterClrMapping/>
+  </p:clrMapOvr>
+</p:notes>
+</file>
+
+<file path=ppt/notesSlides/notesSlide13.xml><?xml version="1.0" encoding="utf-8"?>
+<p:notes xmlns:a="http://schemas.openxmlformats.org/drawingml/2006/main" xmlns:r="http://schemas.openxmlformats.org/officeDocument/2006/relationships" xmlns:p="http://schemas.openxmlformats.org/presentationml/2006/main">
+  <p:cSld>
+    <p:spTree>
+      <p:nvGrpSpPr>
+        <p:cNvPr id="1" name=""/>
+        <p:cNvGrpSpPr/>
+        <p:nvPr/>
+      </p:nvGrpSpPr>
+      <p:grpSpPr>
+        <a:xfrm>
+          <a:off x="0" y="0"/>
+          <a:ext cx="0" cy="0"/>
+          <a:chOff x="0" y="0"/>
+          <a:chExt cx="0" cy="0"/>
+        </a:xfrm>
+      </p:grpSpPr>
+      <p:sp>
+        <p:nvSpPr>
+          <p:cNvPr id="2" name="Slide Image Placeholder 1"/>
+          <p:cNvSpPr>
+            <a:spLocks noGrp="1" noRot="1" noChangeAspect="1"/>
+          </p:cNvSpPr>
+          <p:nvPr>
+            <p:ph type="sldImg"/>
+          </p:nvPr>
+        </p:nvSpPr>
+        <p:spPr/>
+      </p:sp>
+      <p:sp>
+        <p:nvSpPr>
+          <p:cNvPr id="3" name="Notes Placeholder 2"/>
+          <p:cNvSpPr>
+            <a:spLocks noGrp="1"/>
+          </p:cNvSpPr>
+          <p:nvPr>
+            <p:ph type="body" idx="1"/>
+          </p:nvPr>
+        </p:nvSpPr>
+        <p:spPr/>
+        <p:txBody>
+          <a:bodyPr/>
+          <a:lstStyle/>
+          <a:p>
+            <a:r>
+              <a:rPr lang="en-US" dirty="0"/>
+              <a:t/>
+            </a:r>
+            <a:endParaRPr lang="en-US" dirty="0"/>
+          </a:p>
+        </p:txBody>
+      </p:sp>
+      <p:sp>
+        <p:nvSpPr>
+          <p:cNvPr id="4" name="Slide Number Placeholder 3"/>
+          <p:cNvSpPr>
+            <a:spLocks noGrp="1"/>
+          </p:cNvSpPr>
+          <p:nvPr>
+            <p:ph type="sldNum" sz="quarter" idx="10"/>
+          </p:nvPr>
+        </p:nvSpPr>
+        <p:spPr/>
+        <p:txBody>
+          <a:bodyPr/>
+          <a:lstStyle/>
+          <a:p>
+            <a:fld id="{F7021451-1387-4CA6-816F-3879F97B5CBC}" type="slidenum">
+              <a:rPr lang="en-US"/>
+              <a:t>13</a:t>
+            </a:fld>
+            <a:endParaRPr lang="en-US"/>
+          </a:p>
+        </p:txBody>
+      </p:sp>
+    </p:spTree>
+    <p:extLst>
+      <p:ext uri="{BB962C8B-B14F-4D97-AF65-F5344CB8AC3E}">
+        <p14:creationId xmlns:p14="http://schemas.microsoft.com/office/powerpoint/2010/main" val="1024086991"/>
+      </p:ext>
+    </p:extLst>
+  </p:cSld>
+  <p:clrMapOvr>
+    <a:masterClrMapping/>
+  </p:clrMapOvr>
+</p:notes>
+</file>
+
+<file path=ppt/notesSlides/notesSlide14.xml><?xml version="1.0" encoding="utf-8"?>
+<p:notes xmlns:a="http://schemas.openxmlformats.org/drawingml/2006/main" xmlns:r="http://schemas.openxmlformats.org/officeDocument/2006/relationships" xmlns:p="http://schemas.openxmlformats.org/presentationml/2006/main">
+  <p:cSld>
+    <p:spTree>
+      <p:nvGrpSpPr>
+        <p:cNvPr id="1" name=""/>
+        <p:cNvGrpSpPr/>
+        <p:nvPr/>
+      </p:nvGrpSpPr>
+      <p:grpSpPr>
+        <a:xfrm>
+          <a:off x="0" y="0"/>
+          <a:ext cx="0" cy="0"/>
+          <a:chOff x="0" y="0"/>
+          <a:chExt cx="0" cy="0"/>
+        </a:xfrm>
+      </p:grpSpPr>
+      <p:sp>
+        <p:nvSpPr>
+          <p:cNvPr id="2" name="Slide Image Placeholder 1"/>
+          <p:cNvSpPr>
+            <a:spLocks noGrp="1" noRot="1" noChangeAspect="1"/>
+          </p:cNvSpPr>
+          <p:nvPr>
+            <p:ph type="sldImg"/>
+          </p:nvPr>
+        </p:nvSpPr>
+        <p:spPr/>
+      </p:sp>
+      <p:sp>
+        <p:nvSpPr>
+          <p:cNvPr id="3" name="Notes Placeholder 2"/>
+          <p:cNvSpPr>
+            <a:spLocks noGrp="1"/>
+          </p:cNvSpPr>
+          <p:nvPr>
+            <p:ph type="body" idx="1"/>
+          </p:nvPr>
+        </p:nvSpPr>
+        <p:spPr/>
+        <p:txBody>
+          <a:bodyPr/>
+          <a:lstStyle/>
+          <a:p>
+            <a:r>
+              <a:rPr lang="en-US" dirty="0"/>
+              <a:t/>
+            </a:r>
+            <a:endParaRPr lang="en-US" dirty="0"/>
+          </a:p>
+        </p:txBody>
+      </p:sp>
+      <p:sp>
+        <p:nvSpPr>
+          <p:cNvPr id="4" name="Slide Number Placeholder 3"/>
+          <p:cNvSpPr>
+            <a:spLocks noGrp="1"/>
+          </p:cNvSpPr>
+          <p:nvPr>
+            <p:ph type="sldNum" sz="quarter" idx="10"/>
+          </p:nvPr>
+        </p:nvSpPr>
+        <p:spPr/>
+        <p:txBody>
+          <a:bodyPr/>
+          <a:lstStyle/>
+          <a:p>
+            <a:fld id="{F7021451-1387-4CA6-816F-3879F97B5CBC}" type="slidenum">
+              <a:rPr lang="en-US"/>
+              <a:t>14</a:t>
             </a:fld>
             <a:endParaRPr lang="en-US"/>
           </a:p>
@@ -2011,102 +2278,6 @@
         </p:nvSpPr>
         <p:spPr>
           <a:xfrm>
-            <a:off x="406301" y="1223963"/>
-            <a:ext cx="8498026" cy="274290"/>
-          </a:xfrm>
-          <a:prstGeom prst="rect">
-            <a:avLst/>
-          </a:prstGeom>
-          <a:noFill/>
-          <a:ln/>
-        </p:spPr>
-        <p:txBody>
-          <a:bodyPr wrap="square" lIns="0" tIns="0" rIns="0" bIns="0" rtlCol="0" anchor="t"/>
-          <a:lstStyle/>
-          <a:p>
-            <a:pPr algn="l" indent="0" marL="0">
-              <a:lnSpc>
-                <a:spcPts val="2160"/>
-              </a:lnSpc>
-              <a:spcBef>
-                <a:spcPts val="600"/>
-              </a:spcBef>
-              <a:spcAft>
-                <a:spcPts val="800"/>
-              </a:spcAft>
-              <a:buNone/>
-            </a:pPr>
-            <a:r>
-              <a:rPr lang="en-US" sz="1800" b="1" dirty="0">
-                <a:solidFill>
-                  <a:srgbClr val="997929"/>
-                </a:solidFill>
-                <a:latin typeface="Times New Roman" pitchFamily="34" charset="0"/>
-                <a:ea typeface="Times New Roman" pitchFamily="34" charset="-122"/>
-                <a:cs typeface="Times New Roman" pitchFamily="34" charset="-120"/>
-              </a:rPr>
-              <a:t>Learning objective</a:t>
-            </a:r>
-            <a:endParaRPr lang="en-US" sz="1800" dirty="0"/>
-          </a:p>
-        </p:txBody>
-      </p:sp>
-      <p:sp>
-        <p:nvSpPr>
-          <p:cNvPr id="6" name="Text 4"/>
-          <p:cNvSpPr/>
-          <p:nvPr/>
-        </p:nvSpPr>
-        <p:spPr>
-          <a:xfrm>
-            <a:off x="406301" y="1637854"/>
-            <a:ext cx="8498026" cy="213271"/>
-          </a:xfrm>
-          <a:prstGeom prst="rect">
-            <a:avLst/>
-          </a:prstGeom>
-          <a:noFill/>
-          <a:ln/>
-        </p:spPr>
-        <p:txBody>
-          <a:bodyPr wrap="square" lIns="0" tIns="0" rIns="0" bIns="0" rtlCol="0" anchor="t"/>
-          <a:lstStyle/>
-          <a:p>
-            <a:pPr algn="l" indent="0" marL="0">
-              <a:lnSpc>
-                <a:spcPts val="1680"/>
-              </a:lnSpc>
-              <a:spcBef>
-                <a:spcPts val="300"/>
-              </a:spcBef>
-              <a:spcAft>
-                <a:spcPts val="300"/>
-              </a:spcAft>
-              <a:buNone/>
-            </a:pPr>
-            <a:r>
-              <a:rPr lang="en-US" sz="1200" dirty="0">
-                <a:solidFill>
-                  <a:srgbClr val="1A1A1A"/>
-                </a:solidFill>
-                <a:latin typeface="Georgia" pitchFamily="34" charset="0"/>
-                <a:ea typeface="Georgia" pitchFamily="34" charset="-122"/>
-                <a:cs typeface="Georgia" pitchFamily="34" charset="-120"/>
-              </a:rPr>
-              <a:t>By the end of this lesson, students will: discuss the ecological function of river-worship traditions.</a:t>
-            </a:r>
-            <a:endParaRPr lang="en-US" sz="1200" dirty="0"/>
-          </a:p>
-        </p:txBody>
-      </p:sp>
-      <p:sp>
-        <p:nvSpPr>
-          <p:cNvPr id="7" name="Text 5"/>
-          <p:cNvSpPr/>
-          <p:nvPr/>
-        </p:nvSpPr>
-        <p:spPr>
-          <a:xfrm>
             <a:off x="406301" y="4434929"/>
             <a:ext cx="8498026" cy="213271"/>
           </a:xfrm>
@@ -2251,7 +2422,7 @@
                 <a:ea typeface="Times New Roman" pitchFamily="34" charset="-122"/>
                 <a:cs typeface="Times New Roman" pitchFamily="34" charset="-120"/>
               </a:rPr>
-              <a:t>Differentiation</a:t>
+              <a:t>Activity (15 min)</a:t>
             </a:r>
             <a:endParaRPr lang="en-US" sz="1800" dirty="0"/>
           </a:p>
@@ -2265,8 +2436,8 @@
         </p:nvSpPr>
         <p:spPr>
           <a:xfrm>
-            <a:off x="634901" y="883593"/>
-            <a:ext cx="8102798" cy="525661"/>
+            <a:off x="406301" y="870942"/>
+            <a:ext cx="8498026" cy="436066"/>
           </a:xfrm>
           <a:prstGeom prst="rect">
             <a:avLst/>
@@ -2278,31 +2449,13 @@
           <a:bodyPr wrap="square" lIns="0" tIns="0" rIns="0" bIns="0" rtlCol="0" anchor="t"/>
           <a:lstStyle/>
           <a:p>
-            <a:pPr algn="l" marL="342900" indent="-342900">
-              <a:lnSpc>
-                <a:spcPts val="1620"/>
-              </a:lnSpc>
-              <a:spcAft>
-                <a:spcPts val="300"/>
-              </a:spcAft>
-              <a:buSzPct val="100000"/>
-              <a:buChar char="•"/>
-            </a:pPr>
-            <a:r>
-              <a:rPr lang="en-US" sz="1200" b="1" dirty="0">
-                <a:solidFill>
-                  <a:srgbClr val="1A1A1A"/>
-                </a:solidFill>
-                <a:latin typeface="Georgia" pitchFamily="34" charset="0"/>
-                <a:ea typeface="Georgia" pitchFamily="34" charset="-122"/>
-                <a:cs typeface="Georgia" pitchFamily="34" charset="-120"/>
-              </a:rPr>
-              <a:t>Extension:</a:t>
-            </a:r>
             <a:pPr algn="l" indent="0" marL="0">
               <a:lnSpc>
-                <a:spcPts val="1620"/>
-              </a:lnSpc>
+                <a:spcPts val="1680"/>
+              </a:lnSpc>
+              <a:spcBef>
+                <a:spcPts val="300"/>
+              </a:spcBef>
               <a:spcAft>
                 <a:spcPts val="300"/>
               </a:spcAft>
@@ -2317,36 +2470,38 @@
                 <a:ea typeface="Georgia" pitchFamily="34" charset="-122"/>
                 <a:cs typeface="Georgia" pitchFamily="34" charset="-120"/>
               </a:rPr>
-              <a:t> offer one open question or extra problem for fast finishers.</a:t>
-            </a:r>
-            <a:endParaRPr lang="en-US" sz="1200" dirty="0"/>
-          </a:p>
-          <a:p>
-            <a:pPr algn="l" marL="342900" indent="-342900">
-              <a:lnSpc>
-                <a:spcPts val="1620"/>
-              </a:lnSpc>
-              <a:spcAft>
-                <a:spcPts val="300"/>
-              </a:spcAft>
-              <a:buSzPct val="100000"/>
-              <a:buChar char="•"/>
-            </a:pPr>
-            <a:r>
-              <a:rPr lang="en-US" sz="1200" b="1" dirty="0">
-                <a:solidFill>
-                  <a:srgbClr val="1A1A1A"/>
-                </a:solidFill>
-                <a:latin typeface="Georgia" pitchFamily="34" charset="0"/>
-                <a:ea typeface="Georgia" pitchFamily="34" charset="-122"/>
-                <a:cs typeface="Georgia" pitchFamily="34" charset="-120"/>
-              </a:rPr>
-              <a:t>Support:</a:t>
+              <a:t>A scaled version of </a:t>
             </a:r>
             <a:pPr algn="l" indent="0" marL="0">
               <a:lnSpc>
-                <a:spcPts val="1620"/>
-              </a:lnSpc>
+                <a:spcPts val="1680"/>
+              </a:lnSpc>
+              <a:spcBef>
+                <a:spcPts val="300"/>
+              </a:spcBef>
+              <a:spcAft>
+                <a:spcPts val="300"/>
+              </a:spcAft>
+              <a:buNone/>
+            </a:pPr>
+            <a:r>
+              <a:rPr lang="en-US" sz="1200" i="1" dirty="0">
+                <a:solidFill>
+                  <a:srgbClr val="1A1A1A"/>
+                </a:solidFill>
+                <a:latin typeface="Georgia" pitchFamily="34" charset="0"/>
+                <a:ea typeface="Georgia" pitchFamily="34" charset="-122"/>
+                <a:cs typeface="Georgia" pitchFamily="34" charset="-120"/>
+              </a:rPr>
+              <a:t>Sacred Grove (or Local Ecology) Mapping</a:t>
+            </a:r>
+            <a:pPr algn="l" indent="0" marL="0">
+              <a:lnSpc>
+                <a:spcPts val="1680"/>
+              </a:lnSpc>
+              <a:spcBef>
+                <a:spcPts val="300"/>
+              </a:spcBef>
               <a:spcAft>
                 <a:spcPts val="300"/>
               </a:spcAft>
@@ -2361,7 +2516,53 @@
                 <a:ea typeface="Georgia" pitchFamily="34" charset="-122"/>
                 <a:cs typeface="Georgia" pitchFamily="34" charset="-120"/>
               </a:rPr>
-              <a:t> pair students who need scaffolds; offer partial outlines.</a:t>
+              <a:t> (see </a:t>
+            </a:r>
+            <a:pPr algn="l" indent="0" marL="0">
+              <a:lnSpc>
+                <a:spcPts val="1680"/>
+              </a:lnSpc>
+              <a:spcBef>
+                <a:spcPts val="300"/>
+              </a:spcBef>
+              <a:spcAft>
+                <a:spcPts val="300"/>
+              </a:spcAft>
+              <a:buNone/>
+            </a:pPr>
+            <a:r>
+              <a:rPr lang="en-US" sz="1200" dirty="0">
+                <a:solidFill>
+                  <a:srgbClr val="1A1A1A"/>
+                </a:solidFill>
+                <a:latin typeface="Georgia" pitchFamily="34" charset="0"/>
+                <a:ea typeface="Georgia" pitchFamily="34" charset="-122"/>
+                <a:cs typeface="Georgia" pitchFamily="34" charset="-120"/>
+              </a:rPr>
+              <a:t>activities/</a:t>
+            </a:r>
+            <a:pPr algn="l" indent="0" marL="0">
+              <a:lnSpc>
+                <a:spcPts val="1680"/>
+              </a:lnSpc>
+              <a:spcBef>
+                <a:spcPts val="300"/>
+              </a:spcBef>
+              <a:spcAft>
+                <a:spcPts val="300"/>
+              </a:spcAft>
+              <a:buNone/>
+            </a:pPr>
+            <a:r>
+              <a:rPr lang="en-US" sz="1200" dirty="0">
+                <a:solidFill>
+                  <a:srgbClr val="1A1A1A"/>
+                </a:solidFill>
+                <a:latin typeface="Georgia" pitchFamily="34" charset="0"/>
+                <a:ea typeface="Georgia" pitchFamily="34" charset="-122"/>
+                <a:cs typeface="Georgia" pitchFamily="34" charset="-120"/>
+              </a:rPr>
+              <a:t>). Today's slice: focus on the part of the activity that reinforces Rivers as Sacred.</a:t>
             </a:r>
             <a:endParaRPr lang="en-US" sz="1200" dirty="0"/>
           </a:p>
@@ -2519,7 +2720,7 @@
                 <a:ea typeface="Times New Roman" pitchFamily="34" charset="-122"/>
                 <a:cs typeface="Times New Roman" pitchFamily="34" charset="-120"/>
               </a:rPr>
-              <a:t>Teacher notes</a:t>
+              <a:t>Wrap-up (5 min)</a:t>
             </a:r>
             <a:endParaRPr lang="en-US" sz="1800" dirty="0"/>
           </a:p>
@@ -2533,8 +2734,8 @@
         </p:nvSpPr>
         <p:spPr>
           <a:xfrm>
-            <a:off x="406301" y="870942"/>
-            <a:ext cx="8498026" cy="426541"/>
+            <a:off x="634901" y="883593"/>
+            <a:ext cx="8102798" cy="525661"/>
           </a:xfrm>
           <a:prstGeom prst="rect">
             <a:avLst/>
@@ -2546,8 +2747,98 @@
           <a:bodyPr wrap="square" lIns="0" tIns="0" rIns="0" bIns="0" rtlCol="0" anchor="t"/>
           <a:lstStyle/>
           <a:p>
+            <a:pPr algn="l" marL="342900" indent="-342900">
+              <a:lnSpc>
+                <a:spcPts val="1620"/>
+              </a:lnSpc>
+              <a:spcAft>
+                <a:spcPts val="300"/>
+              </a:spcAft>
+              <a:buSzPct val="100000"/>
+              <a:buChar char="•"/>
+            </a:pPr>
+            <a:r>
+              <a:rPr lang="en-US" sz="1200" dirty="0">
+                <a:solidFill>
+                  <a:srgbClr val="1A1A1A"/>
+                </a:solidFill>
+                <a:latin typeface="Georgia" pitchFamily="34" charset="0"/>
+                <a:ea typeface="Georgia" pitchFamily="34" charset="-122"/>
+                <a:cs typeface="Georgia" pitchFamily="34" charset="-120"/>
+              </a:rPr>
+              <a:t>One-sentence exit ticket: </a:t>
+            </a:r>
             <a:pPr algn="l" indent="0" marL="0">
               <a:lnSpc>
+                <a:spcPts val="1620"/>
+              </a:lnSpc>
+              <a:spcAft>
+                <a:spcPts val="300"/>
+              </a:spcAft>
+              <a:buNone/>
+            </a:pPr>
+            <a:r>
+              <a:rPr lang="en-US" sz="1200" i="1" dirty="0">
+                <a:solidFill>
+                  <a:srgbClr val="1A1A1A"/>
+                </a:solidFill>
+                <a:latin typeface="Georgia" pitchFamily="34" charset="0"/>
+                <a:ea typeface="Georgia" pitchFamily="34" charset="-122"/>
+                <a:cs typeface="Georgia" pitchFamily="34" charset="-120"/>
+              </a:rPr>
+              <a:t>"What's one thing you learned today?"</a:t>
+            </a:r>
+            <a:endParaRPr lang="en-US" sz="1200" dirty="0"/>
+          </a:p>
+          <a:p>
+            <a:pPr algn="l" marL="342900" indent="-342900">
+              <a:lnSpc>
+                <a:spcPts val="1620"/>
+              </a:lnSpc>
+              <a:spcAft>
+                <a:spcPts val="300"/>
+              </a:spcAft>
+              <a:buSzPct val="100000"/>
+              <a:buChar char="•"/>
+            </a:pPr>
+            <a:r>
+              <a:rPr lang="en-US" sz="1200" dirty="0">
+                <a:solidFill>
+                  <a:srgbClr val="1A1A1A"/>
+                </a:solidFill>
+                <a:latin typeface="Georgia" pitchFamily="34" charset="0"/>
+                <a:ea typeface="Georgia" pitchFamily="34" charset="-122"/>
+                <a:cs typeface="Georgia" pitchFamily="34" charset="-120"/>
+              </a:rPr>
+              <a:t>Preview tomorrow.</a:t>
+            </a:r>
+            <a:endParaRPr lang="en-US" sz="1200" dirty="0"/>
+          </a:p>
+        </p:txBody>
+      </p:sp>
+      <p:sp>
+        <p:nvSpPr>
+          <p:cNvPr id="5" name="Text 3"/>
+          <p:cNvSpPr/>
+          <p:nvPr/>
+        </p:nvSpPr>
+        <p:spPr>
+          <a:xfrm>
+            <a:off x="406301" y="4434929"/>
+            <a:ext cx="8498026" cy="213271"/>
+          </a:xfrm>
+          <a:prstGeom prst="rect">
+            <a:avLst/>
+          </a:prstGeom>
+          <a:noFill/>
+          <a:ln/>
+        </p:spPr>
+        <p:txBody>
+          <a:bodyPr wrap="square" lIns="0" tIns="0" rIns="0" bIns="0" rtlCol="0" anchor="t"/>
+          <a:lstStyle/>
+          <a:p>
+            <a:pPr algn="l" indent="0" marL="0">
+              <a:lnSpc>
                 <a:spcPts val="1680"/>
               </a:lnSpc>
               <a:spcBef>
@@ -2567,7 +2858,707 @@
                 <a:ea typeface="Georgia" pitchFamily="34" charset="-122"/>
                 <a:cs typeface="Georgia" pitchFamily="34" charset="-120"/>
               </a:rPr>
-              <a:t>– Citations: at least one quoted verse with citation per module. Day 1 already includes one if applicable; you may add more. – Connect to prior modules where natural (especially Module 2 pañcabhūta).</a:t>
+              <a:t>Senior ·  · IKS Curriculum</a:t>
+            </a:r>
+            <a:endParaRPr lang="en-US" sz="1200" dirty="0"/>
+          </a:p>
+        </p:txBody>
+      </p:sp>
+    </p:spTree>
+  </p:cSld>
+  <p:clrMapOvr>
+    <a:masterClrMapping/>
+  </p:clrMapOvr>
+</p:sld>
+</file>
+
+<file path=ppt/slides/slide12.xml><?xml version="1.0" encoding="utf-8"?>
+<p:sld xmlns:a="http://schemas.openxmlformats.org/drawingml/2006/main" xmlns:r="http://schemas.openxmlformats.org/officeDocument/2006/relationships" xmlns:p="http://schemas.openxmlformats.org/presentationml/2006/main">
+  <p:cSld name="Slide 12">
+    <p:bg>
+      <p:bgPr>
+        <a:solidFill>
+          <a:srgbClr val="FAF7F2"/>
+        </a:solidFill>
+      </p:bgPr>
+    </p:bg>
+    <p:spTree>
+      <p:nvGrpSpPr>
+        <p:cNvPr id="1" name=""/>
+        <p:cNvGrpSpPr/>
+        <p:nvPr/>
+      </p:nvGrpSpPr>
+      <p:grpSpPr>
+        <a:xfrm>
+          <a:off x="0" y="0"/>
+          <a:ext cx="0" cy="0"/>
+          <a:chOff x="0" y="0"/>
+          <a:chExt cx="0" cy="0"/>
+        </a:xfrm>
+      </p:grpSpPr>
+      <p:sp>
+        <p:nvSpPr>
+          <p:cNvPr id="2" name="Text 0"/>
+          <p:cNvSpPr/>
+          <p:nvPr/>
+        </p:nvSpPr>
+        <p:spPr>
+          <a:xfrm>
+            <a:off x="0" y="0"/>
+            <a:ext cx="9144000" cy="101501"/>
+          </a:xfrm>
+          <a:prstGeom prst="rect">
+            <a:avLst/>
+          </a:prstGeom>
+          <a:solidFill>
+            <a:srgbClr val="5D1D2E"/>
+          </a:solidFill>
+          <a:ln/>
+        </p:spPr>
+        <p:txBody>
+          <a:bodyPr wrap="square" rtlCol="0" anchor="ctr"/>
+          <a:lstStyle/>
+          <a:p>
+            <a:pPr indent="0" marL="0">
+              <a:buNone/>
+            </a:pPr>
+            <a:endParaRPr lang="en-US" dirty="0"/>
+          </a:p>
+        </p:txBody>
+      </p:sp>
+      <p:sp>
+        <p:nvSpPr>
+          <p:cNvPr id="3" name="Text 1"/>
+          <p:cNvSpPr/>
+          <p:nvPr/>
+        </p:nvSpPr>
+        <p:spPr>
+          <a:xfrm>
+            <a:off x="406301" y="457051"/>
+            <a:ext cx="8498026" cy="274290"/>
+          </a:xfrm>
+          <a:prstGeom prst="rect">
+            <a:avLst/>
+          </a:prstGeom>
+          <a:noFill/>
+          <a:ln/>
+        </p:spPr>
+        <p:txBody>
+          <a:bodyPr wrap="square" lIns="0" tIns="0" rIns="0" bIns="0" rtlCol="0" anchor="t"/>
+          <a:lstStyle/>
+          <a:p>
+            <a:pPr algn="l" indent="0" marL="0">
+              <a:lnSpc>
+                <a:spcPts val="2160"/>
+              </a:lnSpc>
+              <a:spcBef>
+                <a:spcPts val="600"/>
+              </a:spcBef>
+              <a:spcAft>
+                <a:spcPts val="800"/>
+              </a:spcAft>
+              <a:buNone/>
+            </a:pPr>
+            <a:r>
+              <a:rPr lang="en-US" sz="1800" b="1" dirty="0">
+                <a:solidFill>
+                  <a:srgbClr val="997929"/>
+                </a:solidFill>
+                <a:latin typeface="Times New Roman" pitchFamily="34" charset="0"/>
+                <a:ea typeface="Times New Roman" pitchFamily="34" charset="-122"/>
+                <a:cs typeface="Times New Roman" pitchFamily="34" charset="-120"/>
+              </a:rPr>
+              <a:t>Homework</a:t>
+            </a:r>
+            <a:endParaRPr lang="en-US" sz="1800" dirty="0"/>
+          </a:p>
+        </p:txBody>
+      </p:sp>
+      <p:sp>
+        <p:nvSpPr>
+          <p:cNvPr id="4" name="Text 2"/>
+          <p:cNvSpPr/>
+          <p:nvPr/>
+        </p:nvSpPr>
+        <p:spPr>
+          <a:xfrm>
+            <a:off x="406301" y="870942"/>
+            <a:ext cx="8498026" cy="222796"/>
+          </a:xfrm>
+          <a:prstGeom prst="rect">
+            <a:avLst/>
+          </a:prstGeom>
+          <a:noFill/>
+          <a:ln/>
+        </p:spPr>
+        <p:txBody>
+          <a:bodyPr wrap="square" lIns="0" tIns="0" rIns="0" bIns="0" rtlCol="0" anchor="t"/>
+          <a:lstStyle/>
+          <a:p>
+            <a:pPr algn="l" indent="0" marL="0">
+              <a:lnSpc>
+                <a:spcPts val="1680"/>
+              </a:lnSpc>
+              <a:spcBef>
+                <a:spcPts val="300"/>
+              </a:spcBef>
+              <a:spcAft>
+                <a:spcPts val="300"/>
+              </a:spcAft>
+              <a:buNone/>
+            </a:pPr>
+            <a:r>
+              <a:rPr lang="en-US" sz="1200" dirty="0">
+                <a:solidFill>
+                  <a:srgbClr val="1A1A1A"/>
+                </a:solidFill>
+                <a:latin typeface="Georgia" pitchFamily="34" charset="0"/>
+                <a:ea typeface="Georgia" pitchFamily="34" charset="-122"/>
+                <a:cs typeface="Georgia" pitchFamily="34" charset="-120"/>
+              </a:rPr>
+              <a:t>(See </a:t>
+            </a:r>
+            <a:pPr algn="l" indent="0" marL="0">
+              <a:lnSpc>
+                <a:spcPts val="1680"/>
+              </a:lnSpc>
+              <a:spcBef>
+                <a:spcPts val="300"/>
+              </a:spcBef>
+              <a:spcAft>
+                <a:spcPts val="300"/>
+              </a:spcAft>
+              <a:buNone/>
+            </a:pPr>
+            <a:r>
+              <a:rPr lang="en-US" sz="1200" dirty="0">
+                <a:solidFill>
+                  <a:srgbClr val="1A1A1A"/>
+                </a:solidFill>
+                <a:latin typeface="Georgia" pitchFamily="34" charset="0"/>
+                <a:ea typeface="Georgia" pitchFamily="34" charset="-122"/>
+                <a:cs typeface="Georgia" pitchFamily="34" charset="-120"/>
+              </a:rPr>
+              <a:t>homework.md</a:t>
+            </a:r>
+            <a:pPr algn="l" indent="0" marL="0">
+              <a:lnSpc>
+                <a:spcPts val="1680"/>
+              </a:lnSpc>
+              <a:spcBef>
+                <a:spcPts val="300"/>
+              </a:spcBef>
+              <a:spcAft>
+                <a:spcPts val="300"/>
+              </a:spcAft>
+              <a:buNone/>
+            </a:pPr>
+            <a:r>
+              <a:rPr lang="en-US" sz="1200" dirty="0">
+                <a:solidFill>
+                  <a:srgbClr val="1A1A1A"/>
+                </a:solidFill>
+                <a:latin typeface="Georgia" pitchFamily="34" charset="0"/>
+                <a:ea typeface="Georgia" pitchFamily="34" charset="-122"/>
+                <a:cs typeface="Georgia" pitchFamily="34" charset="-120"/>
+              </a:rPr>
+              <a:t> for today's task.)</a:t>
+            </a:r>
+            <a:endParaRPr lang="en-US" sz="1200" dirty="0"/>
+          </a:p>
+        </p:txBody>
+      </p:sp>
+      <p:sp>
+        <p:nvSpPr>
+          <p:cNvPr id="5" name="Text 3"/>
+          <p:cNvSpPr/>
+          <p:nvPr/>
+        </p:nvSpPr>
+        <p:spPr>
+          <a:xfrm>
+            <a:off x="406301" y="4434929"/>
+            <a:ext cx="8498026" cy="213271"/>
+          </a:xfrm>
+          <a:prstGeom prst="rect">
+            <a:avLst/>
+          </a:prstGeom>
+          <a:noFill/>
+          <a:ln/>
+        </p:spPr>
+        <p:txBody>
+          <a:bodyPr wrap="square" lIns="0" tIns="0" rIns="0" bIns="0" rtlCol="0" anchor="t"/>
+          <a:lstStyle/>
+          <a:p>
+            <a:pPr algn="l" indent="0" marL="0">
+              <a:lnSpc>
+                <a:spcPts val="1680"/>
+              </a:lnSpc>
+              <a:spcBef>
+                <a:spcPts val="300"/>
+              </a:spcBef>
+              <a:spcAft>
+                <a:spcPts val="300"/>
+              </a:spcAft>
+              <a:buNone/>
+            </a:pPr>
+            <a:r>
+              <a:rPr lang="en-US" sz="1200" dirty="0">
+                <a:solidFill>
+                  <a:srgbClr val="1A1A1A"/>
+                </a:solidFill>
+                <a:latin typeface="Georgia" pitchFamily="34" charset="0"/>
+                <a:ea typeface="Georgia" pitchFamily="34" charset="-122"/>
+                <a:cs typeface="Georgia" pitchFamily="34" charset="-120"/>
+              </a:rPr>
+              <a:t>Senior ·  · IKS Curriculum</a:t>
+            </a:r>
+            <a:endParaRPr lang="en-US" sz="1200" dirty="0"/>
+          </a:p>
+        </p:txBody>
+      </p:sp>
+    </p:spTree>
+  </p:cSld>
+  <p:clrMapOvr>
+    <a:masterClrMapping/>
+  </p:clrMapOvr>
+</p:sld>
+</file>
+
+<file path=ppt/slides/slide13.xml><?xml version="1.0" encoding="utf-8"?>
+<p:sld xmlns:a="http://schemas.openxmlformats.org/drawingml/2006/main" xmlns:r="http://schemas.openxmlformats.org/officeDocument/2006/relationships" xmlns:p="http://schemas.openxmlformats.org/presentationml/2006/main">
+  <p:cSld name="Slide 13">
+    <p:bg>
+      <p:bgPr>
+        <a:solidFill>
+          <a:srgbClr val="FAF7F2"/>
+        </a:solidFill>
+      </p:bgPr>
+    </p:bg>
+    <p:spTree>
+      <p:nvGrpSpPr>
+        <p:cNvPr id="1" name=""/>
+        <p:cNvGrpSpPr/>
+        <p:nvPr/>
+      </p:nvGrpSpPr>
+      <p:grpSpPr>
+        <a:xfrm>
+          <a:off x="0" y="0"/>
+          <a:ext cx="0" cy="0"/>
+          <a:chOff x="0" y="0"/>
+          <a:chExt cx="0" cy="0"/>
+        </a:xfrm>
+      </p:grpSpPr>
+      <p:sp>
+        <p:nvSpPr>
+          <p:cNvPr id="2" name="Text 0"/>
+          <p:cNvSpPr/>
+          <p:nvPr/>
+        </p:nvSpPr>
+        <p:spPr>
+          <a:xfrm>
+            <a:off x="0" y="0"/>
+            <a:ext cx="9144000" cy="101501"/>
+          </a:xfrm>
+          <a:prstGeom prst="rect">
+            <a:avLst/>
+          </a:prstGeom>
+          <a:solidFill>
+            <a:srgbClr val="5D1D2E"/>
+          </a:solidFill>
+          <a:ln/>
+        </p:spPr>
+        <p:txBody>
+          <a:bodyPr wrap="square" rtlCol="0" anchor="ctr"/>
+          <a:lstStyle/>
+          <a:p>
+            <a:pPr indent="0" marL="0">
+              <a:buNone/>
+            </a:pPr>
+            <a:endParaRPr lang="en-US" dirty="0"/>
+          </a:p>
+        </p:txBody>
+      </p:sp>
+      <p:sp>
+        <p:nvSpPr>
+          <p:cNvPr id="3" name="Text 1"/>
+          <p:cNvSpPr/>
+          <p:nvPr/>
+        </p:nvSpPr>
+        <p:spPr>
+          <a:xfrm>
+            <a:off x="406301" y="457051"/>
+            <a:ext cx="8498026" cy="274290"/>
+          </a:xfrm>
+          <a:prstGeom prst="rect">
+            <a:avLst/>
+          </a:prstGeom>
+          <a:noFill/>
+          <a:ln/>
+        </p:spPr>
+        <p:txBody>
+          <a:bodyPr wrap="square" lIns="0" tIns="0" rIns="0" bIns="0" rtlCol="0" anchor="t"/>
+          <a:lstStyle/>
+          <a:p>
+            <a:pPr algn="l" indent="0" marL="0">
+              <a:lnSpc>
+                <a:spcPts val="2160"/>
+              </a:lnSpc>
+              <a:spcBef>
+                <a:spcPts val="600"/>
+              </a:spcBef>
+              <a:spcAft>
+                <a:spcPts val="800"/>
+              </a:spcAft>
+              <a:buNone/>
+            </a:pPr>
+            <a:r>
+              <a:rPr lang="en-US" sz="1800" b="1" dirty="0">
+                <a:solidFill>
+                  <a:srgbClr val="997929"/>
+                </a:solidFill>
+                <a:latin typeface="Times New Roman" pitchFamily="34" charset="0"/>
+                <a:ea typeface="Times New Roman" pitchFamily="34" charset="-122"/>
+                <a:cs typeface="Times New Roman" pitchFamily="34" charset="-120"/>
+              </a:rPr>
+              <a:t>Differentiation</a:t>
+            </a:r>
+            <a:endParaRPr lang="en-US" sz="1800" dirty="0"/>
+          </a:p>
+        </p:txBody>
+      </p:sp>
+      <p:sp>
+        <p:nvSpPr>
+          <p:cNvPr id="4" name="Text 2"/>
+          <p:cNvSpPr/>
+          <p:nvPr/>
+        </p:nvSpPr>
+        <p:spPr>
+          <a:xfrm>
+            <a:off x="634901" y="883593"/>
+            <a:ext cx="8102798" cy="525661"/>
+          </a:xfrm>
+          <a:prstGeom prst="rect">
+            <a:avLst/>
+          </a:prstGeom>
+          <a:noFill/>
+          <a:ln/>
+        </p:spPr>
+        <p:txBody>
+          <a:bodyPr wrap="square" lIns="0" tIns="0" rIns="0" bIns="0" rtlCol="0" anchor="t"/>
+          <a:lstStyle/>
+          <a:p>
+            <a:pPr algn="l" marL="342900" indent="-342900">
+              <a:lnSpc>
+                <a:spcPts val="1620"/>
+              </a:lnSpc>
+              <a:spcAft>
+                <a:spcPts val="300"/>
+              </a:spcAft>
+              <a:buSzPct val="100000"/>
+              <a:buChar char="•"/>
+            </a:pPr>
+            <a:r>
+              <a:rPr lang="en-US" sz="1200" b="1" dirty="0">
+                <a:solidFill>
+                  <a:srgbClr val="1A1A1A"/>
+                </a:solidFill>
+                <a:latin typeface="Georgia" pitchFamily="34" charset="0"/>
+                <a:ea typeface="Georgia" pitchFamily="34" charset="-122"/>
+                <a:cs typeface="Georgia" pitchFamily="34" charset="-120"/>
+              </a:rPr>
+              <a:t>Extension:</a:t>
+            </a:r>
+            <a:pPr algn="l" indent="0" marL="0">
+              <a:lnSpc>
+                <a:spcPts val="1620"/>
+              </a:lnSpc>
+              <a:spcAft>
+                <a:spcPts val="300"/>
+              </a:spcAft>
+              <a:buNone/>
+            </a:pPr>
+            <a:r>
+              <a:rPr lang="en-US" sz="1200" dirty="0">
+                <a:solidFill>
+                  <a:srgbClr val="1A1A1A"/>
+                </a:solidFill>
+                <a:latin typeface="Georgia" pitchFamily="34" charset="0"/>
+                <a:ea typeface="Georgia" pitchFamily="34" charset="-122"/>
+                <a:cs typeface="Georgia" pitchFamily="34" charset="-120"/>
+              </a:rPr>
+              <a:t> offer one open question or extra problem for fast finishers.</a:t>
+            </a:r>
+            <a:endParaRPr lang="en-US" sz="1200" dirty="0"/>
+          </a:p>
+          <a:p>
+            <a:pPr algn="l" marL="342900" indent="-342900">
+              <a:lnSpc>
+                <a:spcPts val="1620"/>
+              </a:lnSpc>
+              <a:spcAft>
+                <a:spcPts val="300"/>
+              </a:spcAft>
+              <a:buSzPct val="100000"/>
+              <a:buChar char="•"/>
+            </a:pPr>
+            <a:r>
+              <a:rPr lang="en-US" sz="1200" b="1" dirty="0">
+                <a:solidFill>
+                  <a:srgbClr val="1A1A1A"/>
+                </a:solidFill>
+                <a:latin typeface="Georgia" pitchFamily="34" charset="0"/>
+                <a:ea typeface="Georgia" pitchFamily="34" charset="-122"/>
+                <a:cs typeface="Georgia" pitchFamily="34" charset="-120"/>
+              </a:rPr>
+              <a:t>Support:</a:t>
+            </a:r>
+            <a:pPr algn="l" indent="0" marL="0">
+              <a:lnSpc>
+                <a:spcPts val="1620"/>
+              </a:lnSpc>
+              <a:spcAft>
+                <a:spcPts val="300"/>
+              </a:spcAft>
+              <a:buNone/>
+            </a:pPr>
+            <a:r>
+              <a:rPr lang="en-US" sz="1200" dirty="0">
+                <a:solidFill>
+                  <a:srgbClr val="1A1A1A"/>
+                </a:solidFill>
+                <a:latin typeface="Georgia" pitchFamily="34" charset="0"/>
+                <a:ea typeface="Georgia" pitchFamily="34" charset="-122"/>
+                <a:cs typeface="Georgia" pitchFamily="34" charset="-120"/>
+              </a:rPr>
+              <a:t> pair students who need scaffolds; offer partial outlines.</a:t>
+            </a:r>
+            <a:endParaRPr lang="en-US" sz="1200" dirty="0"/>
+          </a:p>
+        </p:txBody>
+      </p:sp>
+      <p:sp>
+        <p:nvSpPr>
+          <p:cNvPr id="5" name="Text 3"/>
+          <p:cNvSpPr/>
+          <p:nvPr/>
+        </p:nvSpPr>
+        <p:spPr>
+          <a:xfrm>
+            <a:off x="406301" y="4434929"/>
+            <a:ext cx="8498026" cy="213271"/>
+          </a:xfrm>
+          <a:prstGeom prst="rect">
+            <a:avLst/>
+          </a:prstGeom>
+          <a:noFill/>
+          <a:ln/>
+        </p:spPr>
+        <p:txBody>
+          <a:bodyPr wrap="square" lIns="0" tIns="0" rIns="0" bIns="0" rtlCol="0" anchor="t"/>
+          <a:lstStyle/>
+          <a:p>
+            <a:pPr algn="l" indent="0" marL="0">
+              <a:lnSpc>
+                <a:spcPts val="1680"/>
+              </a:lnSpc>
+              <a:spcBef>
+                <a:spcPts val="300"/>
+              </a:spcBef>
+              <a:spcAft>
+                <a:spcPts val="300"/>
+              </a:spcAft>
+              <a:buNone/>
+            </a:pPr>
+            <a:r>
+              <a:rPr lang="en-US" sz="1200" dirty="0">
+                <a:solidFill>
+                  <a:srgbClr val="1A1A1A"/>
+                </a:solidFill>
+                <a:latin typeface="Georgia" pitchFamily="34" charset="0"/>
+                <a:ea typeface="Georgia" pitchFamily="34" charset="-122"/>
+                <a:cs typeface="Georgia" pitchFamily="34" charset="-120"/>
+              </a:rPr>
+              <a:t>Senior ·  · IKS Curriculum</a:t>
+            </a:r>
+            <a:endParaRPr lang="en-US" sz="1200" dirty="0"/>
+          </a:p>
+        </p:txBody>
+      </p:sp>
+    </p:spTree>
+  </p:cSld>
+  <p:clrMapOvr>
+    <a:masterClrMapping/>
+  </p:clrMapOvr>
+</p:sld>
+</file>
+
+<file path=ppt/slides/slide14.xml><?xml version="1.0" encoding="utf-8"?>
+<p:sld xmlns:a="http://schemas.openxmlformats.org/drawingml/2006/main" xmlns:r="http://schemas.openxmlformats.org/officeDocument/2006/relationships" xmlns:p="http://schemas.openxmlformats.org/presentationml/2006/main">
+  <p:cSld name="Slide 14">
+    <p:bg>
+      <p:bgPr>
+        <a:solidFill>
+          <a:srgbClr val="FAF7F2"/>
+        </a:solidFill>
+      </p:bgPr>
+    </p:bg>
+    <p:spTree>
+      <p:nvGrpSpPr>
+        <p:cNvPr id="1" name=""/>
+        <p:cNvGrpSpPr/>
+        <p:nvPr/>
+      </p:nvGrpSpPr>
+      <p:grpSpPr>
+        <a:xfrm>
+          <a:off x="0" y="0"/>
+          <a:ext cx="0" cy="0"/>
+          <a:chOff x="0" y="0"/>
+          <a:chExt cx="0" cy="0"/>
+        </a:xfrm>
+      </p:grpSpPr>
+      <p:sp>
+        <p:nvSpPr>
+          <p:cNvPr id="2" name="Text 0"/>
+          <p:cNvSpPr/>
+          <p:nvPr/>
+        </p:nvSpPr>
+        <p:spPr>
+          <a:xfrm>
+            <a:off x="0" y="0"/>
+            <a:ext cx="9144000" cy="101501"/>
+          </a:xfrm>
+          <a:prstGeom prst="rect">
+            <a:avLst/>
+          </a:prstGeom>
+          <a:solidFill>
+            <a:srgbClr val="5D1D2E"/>
+          </a:solidFill>
+          <a:ln/>
+        </p:spPr>
+        <p:txBody>
+          <a:bodyPr wrap="square" rtlCol="0" anchor="ctr"/>
+          <a:lstStyle/>
+          <a:p>
+            <a:pPr indent="0" marL="0">
+              <a:buNone/>
+            </a:pPr>
+            <a:endParaRPr lang="en-US" dirty="0"/>
+          </a:p>
+        </p:txBody>
+      </p:sp>
+      <p:sp>
+        <p:nvSpPr>
+          <p:cNvPr id="3" name="Text 1"/>
+          <p:cNvSpPr/>
+          <p:nvPr/>
+        </p:nvSpPr>
+        <p:spPr>
+          <a:xfrm>
+            <a:off x="406301" y="457051"/>
+            <a:ext cx="8498026" cy="274290"/>
+          </a:xfrm>
+          <a:prstGeom prst="rect">
+            <a:avLst/>
+          </a:prstGeom>
+          <a:noFill/>
+          <a:ln/>
+        </p:spPr>
+        <p:txBody>
+          <a:bodyPr wrap="square" lIns="0" tIns="0" rIns="0" bIns="0" rtlCol="0" anchor="t"/>
+          <a:lstStyle/>
+          <a:p>
+            <a:pPr algn="l" indent="0" marL="0">
+              <a:lnSpc>
+                <a:spcPts val="2160"/>
+              </a:lnSpc>
+              <a:spcBef>
+                <a:spcPts val="600"/>
+              </a:spcBef>
+              <a:spcAft>
+                <a:spcPts val="800"/>
+              </a:spcAft>
+              <a:buNone/>
+            </a:pPr>
+            <a:r>
+              <a:rPr lang="en-US" sz="1800" b="1" dirty="0">
+                <a:solidFill>
+                  <a:srgbClr val="997929"/>
+                </a:solidFill>
+                <a:latin typeface="Times New Roman" pitchFamily="34" charset="0"/>
+                <a:ea typeface="Times New Roman" pitchFamily="34" charset="-122"/>
+                <a:cs typeface="Times New Roman" pitchFamily="34" charset="-120"/>
+              </a:rPr>
+              <a:t>Teacher notes</a:t>
+            </a:r>
+            <a:endParaRPr lang="en-US" sz="1800" dirty="0"/>
+          </a:p>
+        </p:txBody>
+      </p:sp>
+      <p:sp>
+        <p:nvSpPr>
+          <p:cNvPr id="4" name="Text 2"/>
+          <p:cNvSpPr/>
+          <p:nvPr/>
+        </p:nvSpPr>
+        <p:spPr>
+          <a:xfrm>
+            <a:off x="634901" y="883593"/>
+            <a:ext cx="8102798" cy="731341"/>
+          </a:xfrm>
+          <a:prstGeom prst="rect">
+            <a:avLst/>
+          </a:prstGeom>
+          <a:noFill/>
+          <a:ln/>
+        </p:spPr>
+        <p:txBody>
+          <a:bodyPr wrap="square" lIns="0" tIns="0" rIns="0" bIns="0" rtlCol="0" anchor="t"/>
+          <a:lstStyle/>
+          <a:p>
+            <a:pPr algn="l" marL="342900" indent="-342900">
+              <a:lnSpc>
+                <a:spcPts val="1620"/>
+              </a:lnSpc>
+              <a:spcAft>
+                <a:spcPts val="300"/>
+              </a:spcAft>
+              <a:buSzPct val="100000"/>
+              <a:buChar char="•"/>
+            </a:pPr>
+            <a:r>
+              <a:rPr lang="en-US" sz="1200" dirty="0">
+                <a:solidFill>
+                  <a:srgbClr val="1A1A1A"/>
+                </a:solidFill>
+                <a:latin typeface="Georgia" pitchFamily="34" charset="0"/>
+                <a:ea typeface="Georgia" pitchFamily="34" charset="-122"/>
+                <a:cs typeface="Georgia" pitchFamily="34" charset="-120"/>
+              </a:rPr>
+              <a:t>Citations: at least one quoted verse with citation per module. Day 1 already includes one if applicable; you may add more.</a:t>
+            </a:r>
+            <a:endParaRPr lang="en-US" sz="1200" dirty="0"/>
+          </a:p>
+          <a:p>
+            <a:pPr algn="l" marL="342900" indent="-342900">
+              <a:lnSpc>
+                <a:spcPts val="1620"/>
+              </a:lnSpc>
+              <a:spcAft>
+                <a:spcPts val="300"/>
+              </a:spcAft>
+              <a:buSzPct val="100000"/>
+              <a:buChar char="•"/>
+            </a:pPr>
+            <a:r>
+              <a:rPr lang="en-US" sz="1200" dirty="0">
+                <a:solidFill>
+                  <a:srgbClr val="1A1A1A"/>
+                </a:solidFill>
+                <a:latin typeface="Georgia" pitchFamily="34" charset="0"/>
+                <a:ea typeface="Georgia" pitchFamily="34" charset="-122"/>
+                <a:cs typeface="Georgia" pitchFamily="34" charset="-120"/>
+              </a:rPr>
+              <a:t>Connect to prior modules where natural (especially Module 2 pañcabhūta).</a:t>
             </a:r>
             <a:endParaRPr lang="en-US" sz="1200" dirty="0"/>
           </a:p>
@@ -2725,7 +3716,7 @@
                 <a:ea typeface="Times New Roman" pitchFamily="34" charset="-122"/>
                 <a:cs typeface="Times New Roman" pitchFamily="34" charset="-120"/>
               </a:rPr>
-              <a:t>Materials</a:t>
+              <a:t>Learning objective</a:t>
             </a:r>
             <a:endParaRPr lang="en-US" sz="1800" dirty="0"/>
           </a:p>
@@ -2773,7 +3764,7 @@
                 <a:ea typeface="Georgia" pitchFamily="34" charset="-122"/>
                 <a:cs typeface="Georgia" pitchFamily="34" charset="-120"/>
               </a:rPr>
-              <a:t>– Whiteboard / chart paper – Notebook, pen per student</a:t>
+              <a:t>By the end of this lesson, students will: discuss the ecological function of river-worship traditions.</a:t>
             </a:r>
             <a:endParaRPr lang="en-US" sz="1200" dirty="0"/>
           </a:p>
@@ -2782,52 +3773,6 @@
       <p:sp>
         <p:nvSpPr>
           <p:cNvPr id="5" name="Text 3"/>
-          <p:cNvSpPr/>
-          <p:nvPr/>
-        </p:nvSpPr>
-        <p:spPr>
-          <a:xfrm>
-            <a:off x="634901" y="1173063"/>
-            <a:ext cx="8102798" cy="281880"/>
-          </a:xfrm>
-          <a:prstGeom prst="rect">
-            <a:avLst/>
-          </a:prstGeom>
-          <a:noFill/>
-          <a:ln/>
-        </p:spPr>
-        <p:txBody>
-          <a:bodyPr wrap="square" lIns="0" tIns="0" rIns="0" bIns="0" rtlCol="0" anchor="t"/>
-          <a:lstStyle/>
-          <a:p>
-            <a:pPr algn="l" marL="342900" indent="-342900">
-              <a:lnSpc>
-                <a:spcPts val="1620"/>
-              </a:lnSpc>
-              <a:spcAft>
-                <a:spcPts val="300"/>
-              </a:spcAft>
-              <a:buSzPct val="100000"/>
-              <a:buChar char="•"/>
-            </a:pPr>
-            <a:r>
-              <a:rPr lang="en-US" sz="1200" dirty="0">
-                <a:solidFill>
-                  <a:srgbClr val="1A1A1A"/>
-                </a:solidFill>
-                <a:latin typeface="Georgia" pitchFamily="34" charset="0"/>
-                <a:ea typeface="Georgia" pitchFamily="34" charset="-122"/>
-                <a:cs typeface="Georgia" pitchFamily="34" charset="-120"/>
-              </a:rPr>
-              <a:t>(See lesson-plan.md for any day-specific materials)</a:t>
-            </a:r>
-            <a:endParaRPr lang="en-US" sz="1200" dirty="0"/>
-          </a:p>
-        </p:txBody>
-      </p:sp>
-      <p:sp>
-        <p:nvSpPr>
-          <p:cNvPr id="6" name="Text 4"/>
           <p:cNvSpPr/>
           <p:nvPr/>
         </p:nvSpPr>
@@ -2977,7 +3922,7 @@
                 <a:ea typeface="Times New Roman" pitchFamily="34" charset="-122"/>
                 <a:cs typeface="Times New Roman" pitchFamily="34" charset="-120"/>
               </a:rPr>
-              <a:t>Vocabulary introduced today</a:t>
+              <a:t>Materials</a:t>
             </a:r>
             <a:endParaRPr lang="en-US" sz="1800" dirty="0"/>
           </a:p>
@@ -2992,7 +3937,7 @@
         <p:spPr>
           <a:xfrm>
             <a:off x="634901" y="883593"/>
-            <a:ext cx="8102798" cy="281880"/>
+            <a:ext cx="8102798" cy="769441"/>
           </a:xfrm>
           <a:prstGeom prst="rect">
             <a:avLst/>
@@ -3015,24 +3960,28 @@
               <a:buChar char="•"/>
             </a:pPr>
             <a:r>
-              <a:rPr lang="en-US" sz="1200" i="1" dirty="0">
-                <a:solidFill>
-                  <a:srgbClr val="1A1A1A"/>
-                </a:solidFill>
-                <a:latin typeface="Georgia" pitchFamily="34" charset="0"/>
-                <a:ea typeface="Georgia" pitchFamily="34" charset="-122"/>
-                <a:cs typeface="Georgia" pitchFamily="34" charset="-120"/>
-              </a:rPr>
-              <a:t>ahiṁsā</a:t>
-            </a:r>
-            <a:pPr algn="l" indent="0" marL="0">
+              <a:rPr lang="en-US" sz="1200" dirty="0">
+                <a:solidFill>
+                  <a:srgbClr val="1A1A1A"/>
+                </a:solidFill>
+                <a:latin typeface="Georgia" pitchFamily="34" charset="0"/>
+                <a:ea typeface="Georgia" pitchFamily="34" charset="-122"/>
+                <a:cs typeface="Georgia" pitchFamily="34" charset="-120"/>
+              </a:rPr>
+              <a:t>Whiteboard / chart paper</a:t>
+            </a:r>
+            <a:endParaRPr lang="en-US" sz="1200" dirty="0"/>
+          </a:p>
+          <a:p>
+            <a:pPr algn="l" marL="342900" indent="-342900">
               <a:lnSpc>
                 <a:spcPts val="1620"/>
               </a:lnSpc>
               <a:spcAft>
                 <a:spcPts val="300"/>
               </a:spcAft>
-              <a:buNone/>
+              <a:buSzPct val="100000"/>
+              <a:buChar char="•"/>
             </a:pPr>
             <a:r>
               <a:rPr lang="en-US" sz="1200" dirty="0">
@@ -3043,7 +3992,31 @@
                 <a:ea typeface="Georgia" pitchFamily="34" charset="-122"/>
                 <a:cs typeface="Georgia" pitchFamily="34" charset="-120"/>
               </a:rPr>
-              <a:t> (IAST: ahiṁsā; lit. "non-violence; extended to non-human life")</a:t>
+              <a:t>Notebook, pen per student</a:t>
+            </a:r>
+            <a:endParaRPr lang="en-US" sz="1200" dirty="0"/>
+          </a:p>
+          <a:p>
+            <a:pPr algn="l" marL="342900" indent="-342900">
+              <a:lnSpc>
+                <a:spcPts val="1620"/>
+              </a:lnSpc>
+              <a:spcAft>
+                <a:spcPts val="300"/>
+              </a:spcAft>
+              <a:buSzPct val="100000"/>
+              <a:buChar char="•"/>
+            </a:pPr>
+            <a:r>
+              <a:rPr lang="en-US" sz="1200" dirty="0">
+                <a:solidFill>
+                  <a:srgbClr val="1A1A1A"/>
+                </a:solidFill>
+                <a:latin typeface="Georgia" pitchFamily="34" charset="0"/>
+                <a:ea typeface="Georgia" pitchFamily="34" charset="-122"/>
+                <a:cs typeface="Georgia" pitchFamily="34" charset="-120"/>
+              </a:rPr>
+              <a:t>(See lesson-plan.md for any day-specific materials)</a:t>
             </a:r>
             <a:endParaRPr lang="en-US" sz="1200" dirty="0"/>
           </a:p>
@@ -3201,7 +4174,7 @@
                 <a:ea typeface="Times New Roman" pitchFamily="34" charset="-122"/>
                 <a:cs typeface="Times New Roman" pitchFamily="34" charset="-120"/>
               </a:rPr>
-              <a:t>Lesson flow</a:t>
+              <a:t>Vocabulary introduced today</a:t>
             </a:r>
             <a:endParaRPr lang="en-US" sz="1800" dirty="0"/>
           </a:p>
@@ -3210,6 +4183,72 @@
       <p:sp>
         <p:nvSpPr>
           <p:cNvPr id="4" name="Text 2"/>
+          <p:cNvSpPr/>
+          <p:nvPr/>
+        </p:nvSpPr>
+        <p:spPr>
+          <a:xfrm>
+            <a:off x="634901" y="883593"/>
+            <a:ext cx="8102798" cy="281880"/>
+          </a:xfrm>
+          <a:prstGeom prst="rect">
+            <a:avLst/>
+          </a:prstGeom>
+          <a:noFill/>
+          <a:ln/>
+        </p:spPr>
+        <p:txBody>
+          <a:bodyPr wrap="square" lIns="0" tIns="0" rIns="0" bIns="0" rtlCol="0" anchor="t"/>
+          <a:lstStyle/>
+          <a:p>
+            <a:pPr algn="l" marL="342900" indent="-342900">
+              <a:lnSpc>
+                <a:spcPts val="1620"/>
+              </a:lnSpc>
+              <a:spcAft>
+                <a:spcPts val="300"/>
+              </a:spcAft>
+              <a:buSzPct val="100000"/>
+              <a:buChar char="•"/>
+            </a:pPr>
+            <a:r>
+              <a:rPr lang="en-US" sz="1200" i="1" dirty="0">
+                <a:solidFill>
+                  <a:srgbClr val="1A1A1A"/>
+                </a:solidFill>
+                <a:latin typeface="Georgia" pitchFamily="34" charset="0"/>
+                <a:ea typeface="Georgia" pitchFamily="34" charset="-122"/>
+                <a:cs typeface="Georgia" pitchFamily="34" charset="-120"/>
+              </a:rPr>
+              <a:t>ahiṁsā</a:t>
+            </a:r>
+            <a:pPr algn="l" indent="0" marL="0">
+              <a:lnSpc>
+                <a:spcPts val="1620"/>
+              </a:lnSpc>
+              <a:spcAft>
+                <a:spcPts val="300"/>
+              </a:spcAft>
+              <a:buNone/>
+            </a:pPr>
+            <a:r>
+              <a:rPr lang="en-US" sz="1200" dirty="0">
+                <a:solidFill>
+                  <a:srgbClr val="1A1A1A"/>
+                </a:solidFill>
+                <a:latin typeface="Georgia" pitchFamily="34" charset="0"/>
+                <a:ea typeface="Georgia" pitchFamily="34" charset="-122"/>
+                <a:cs typeface="Georgia" pitchFamily="34" charset="-120"/>
+              </a:rPr>
+              <a:t> (IAST: ahiṁsā; lit. "non-violence; extended to non-human life")</a:t>
+            </a:r>
+            <a:endParaRPr lang="en-US" sz="1200" dirty="0"/>
+          </a:p>
+        </p:txBody>
+      </p:sp>
+      <p:sp>
+        <p:nvSpPr>
+          <p:cNvPr id="5" name="Text 3"/>
           <p:cNvSpPr/>
           <p:nvPr/>
         </p:nvSpPr>
@@ -3359,7 +4398,7 @@
                 <a:ea typeface="Times New Roman" pitchFamily="34" charset="-122"/>
                 <a:cs typeface="Times New Roman" pitchFamily="34" charset="-120"/>
               </a:rPr>
-              <a:t>Warm-up (5 min)</a:t>
+              <a:t>Lesson flow</a:t>
             </a:r>
             <a:endParaRPr lang="en-US" sz="1800" dirty="0"/>
           </a:p>
@@ -3368,100 +4407,6 @@
       <p:sp>
         <p:nvSpPr>
           <p:cNvPr id="4" name="Text 2"/>
-          <p:cNvSpPr/>
-          <p:nvPr/>
-        </p:nvSpPr>
-        <p:spPr>
-          <a:xfrm>
-            <a:off x="406301" y="870942"/>
-            <a:ext cx="8498026" cy="426541"/>
-          </a:xfrm>
-          <a:prstGeom prst="rect">
-            <a:avLst/>
-          </a:prstGeom>
-          <a:noFill/>
-          <a:ln/>
-        </p:spPr>
-        <p:txBody>
-          <a:bodyPr wrap="square" lIns="0" tIns="0" rIns="0" bIns="0" rtlCol="0" anchor="t"/>
-          <a:lstStyle/>
-          <a:p>
-            <a:pPr algn="l" indent="0" marL="0">
-              <a:lnSpc>
-                <a:spcPts val="1680"/>
-              </a:lnSpc>
-              <a:spcBef>
-                <a:spcPts val="300"/>
-              </a:spcBef>
-              <a:spcAft>
-                <a:spcPts val="300"/>
-              </a:spcAft>
-              <a:buNone/>
-            </a:pPr>
-            <a:r>
-              <a:rPr lang="en-US" sz="1200" dirty="0">
-                <a:solidFill>
-                  <a:srgbClr val="1A1A1A"/>
-                </a:solidFill>
-                <a:latin typeface="Georgia" pitchFamily="34" charset="0"/>
-                <a:ea typeface="Georgia" pitchFamily="34" charset="-122"/>
-                <a:cs typeface="Georgia" pitchFamily="34" charset="-120"/>
-              </a:rPr>
-              <a:t>– Daily check-in: one-sentence response to </a:t>
-            </a:r>
-            <a:pPr algn="l" indent="0" marL="0">
-              <a:lnSpc>
-                <a:spcPts val="1680"/>
-              </a:lnSpc>
-              <a:spcBef>
-                <a:spcPts val="300"/>
-              </a:spcBef>
-              <a:spcAft>
-                <a:spcPts val="300"/>
-              </a:spcAft>
-              <a:buNone/>
-            </a:pPr>
-            <a:r>
-              <a:rPr lang="en-US" sz="1200" i="1" dirty="0">
-                <a:solidFill>
-                  <a:srgbClr val="1A1A1A"/>
-                </a:solidFill>
-                <a:latin typeface="Georgia" pitchFamily="34" charset="0"/>
-                <a:ea typeface="Georgia" pitchFamily="34" charset="-122"/>
-                <a:cs typeface="Georgia" pitchFamily="34" charset="-120"/>
-              </a:rPr>
-              <a:t>"What's one thing you remember about yesterday's lesson?"</a:t>
-            </a:r>
-            <a:pPr algn="l" indent="0" marL="0">
-              <a:lnSpc>
-                <a:spcPts val="1680"/>
-              </a:lnSpc>
-              <a:spcBef>
-                <a:spcPts val="300"/>
-              </a:spcBef>
-              <a:spcAft>
-                <a:spcPts val="300"/>
-              </a:spcAft>
-              <a:buNone/>
-            </a:pPr>
-            <a:r>
-              <a:rPr lang="en-US" sz="1200" dirty="0">
-                <a:solidFill>
-                  <a:srgbClr val="1A1A1A"/>
-                </a:solidFill>
-                <a:latin typeface="Georgia" pitchFamily="34" charset="0"/>
-                <a:ea typeface="Georgia" pitchFamily="34" charset="-122"/>
-                <a:cs typeface="Georgia" pitchFamily="34" charset="-120"/>
-              </a:rPr>
-              <a:t> – Hook: introduce a phenomenon or question that motivates today's concept.</a:t>
-            </a:r>
-            <a:endParaRPr lang="en-US" sz="1200" dirty="0"/>
-          </a:p>
-        </p:txBody>
-      </p:sp>
-      <p:sp>
-        <p:nvSpPr>
-          <p:cNvPr id="5" name="Text 3"/>
           <p:cNvSpPr/>
           <p:nvPr/>
         </p:nvSpPr>
@@ -3611,7 +4556,7 @@
                 <a:ea typeface="Times New Roman" pitchFamily="34" charset="-122"/>
                 <a:cs typeface="Times New Roman" pitchFamily="34" charset="-120"/>
               </a:rPr>
-              <a:t>Core (20 min)</a:t>
+              <a:t>Warm-up (5 min)</a:t>
             </a:r>
             <a:endParaRPr lang="en-US" sz="1800" dirty="0"/>
           </a:p>
@@ -3626,7 +4571,7 @@
         <p:spPr>
           <a:xfrm>
             <a:off x="634901" y="883593"/>
-            <a:ext cx="8102798" cy="487561"/>
+            <a:ext cx="8102798" cy="525661"/>
           </a:xfrm>
           <a:prstGeom prst="rect">
             <a:avLst/>
@@ -3649,15 +4594,15 @@
               <a:buChar char="•"/>
             </a:pPr>
             <a:r>
-              <a:rPr lang="en-US" sz="1200" b="1" dirty="0">
-                <a:solidFill>
-                  <a:srgbClr val="1A1A1A"/>
-                </a:solidFill>
-                <a:latin typeface="Georgia" pitchFamily="34" charset="0"/>
-                <a:ea typeface="Georgia" pitchFamily="34" charset="-122"/>
-                <a:cs typeface="Georgia" pitchFamily="34" charset="-120"/>
-              </a:rPr>
-              <a:t>The Indian river tradition.</a:t>
+              <a:rPr lang="en-US" sz="1200" dirty="0">
+                <a:solidFill>
+                  <a:srgbClr val="1A1A1A"/>
+                </a:solidFill>
+                <a:latin typeface="Georgia" pitchFamily="34" charset="0"/>
+                <a:ea typeface="Georgia" pitchFamily="34" charset="-122"/>
+                <a:cs typeface="Georgia" pitchFamily="34" charset="-120"/>
+              </a:rPr>
+              <a:t>Daily check-in: one-sentence response to </a:t>
             </a:r>
             <a:pPr algn="l" indent="0" marL="0">
               <a:lnSpc>
@@ -3669,26 +4614,6 @@
               <a:buNone/>
             </a:pPr>
             <a:r>
-              <a:rPr lang="en-US" sz="1200" dirty="0">
-                <a:solidFill>
-                  <a:srgbClr val="1A1A1A"/>
-                </a:solidFill>
-                <a:latin typeface="Georgia" pitchFamily="34" charset="0"/>
-                <a:ea typeface="Georgia" pitchFamily="34" charset="-122"/>
-                <a:cs typeface="Georgia" pitchFamily="34" charset="-120"/>
-              </a:rPr>
-              <a:t> </a:t>
-            </a:r>
-            <a:pPr algn="l" indent="0" marL="0">
-              <a:lnSpc>
-                <a:spcPts val="1620"/>
-              </a:lnSpc>
-              <a:spcAft>
-                <a:spcPts val="300"/>
-              </a:spcAft>
-              <a:buNone/>
-            </a:pPr>
-            <a:r>
               <a:rPr lang="en-US" sz="1200" i="1" dirty="0">
                 <a:solidFill>
                   <a:srgbClr val="1A1A1A"/>
@@ -3697,52 +4622,10 @@
                 <a:ea typeface="Georgia" pitchFamily="34" charset="-122"/>
                 <a:cs typeface="Georgia" pitchFamily="34" charset="-120"/>
               </a:rPr>
-              <a:t>Gaṅgā, Yamunā, Sarasvatī, Narmadā, Kāverī, Godāvarī, Sindhu</a:t>
-            </a:r>
-            <a:pPr algn="l" indent="0" marL="0">
-              <a:lnSpc>
-                <a:spcPts val="1620"/>
-              </a:lnSpc>
-              <a:spcAft>
-                <a:spcPts val="300"/>
-              </a:spcAft>
-              <a:buNone/>
-            </a:pPr>
-            <a:r>
-              <a:rPr lang="en-US" sz="1200" dirty="0">
-                <a:solidFill>
-                  <a:srgbClr val="1A1A1A"/>
-                </a:solidFill>
-                <a:latin typeface="Georgia" pitchFamily="34" charset="0"/>
-                <a:ea typeface="Georgia" pitchFamily="34" charset="-122"/>
-                <a:cs typeface="Georgia" pitchFamily="34" charset="-120"/>
-              </a:rPr>
-              <a:t> — seven sacred rivers in Hindu tradition. Each has festival cycles, pilgrimage routes, ritual practices.</a:t>
+              <a:t>"What's one thing you remember about yesterday's lesson?"</a:t>
             </a:r>
             <a:endParaRPr lang="en-US" sz="1200" dirty="0"/>
           </a:p>
-        </p:txBody>
-      </p:sp>
-      <p:sp>
-        <p:nvSpPr>
-          <p:cNvPr id="5" name="Text 3"/>
-          <p:cNvSpPr/>
-          <p:nvPr/>
-        </p:nvSpPr>
-        <p:spPr>
-          <a:xfrm>
-            <a:off x="634901" y="1472654"/>
-            <a:ext cx="8102798" cy="693241"/>
-          </a:xfrm>
-          <a:prstGeom prst="rect">
-            <a:avLst/>
-          </a:prstGeom>
-          <a:noFill/>
-          <a:ln/>
-        </p:spPr>
-        <p:txBody>
-          <a:bodyPr wrap="square" lIns="0" tIns="0" rIns="0" bIns="0" rtlCol="0" anchor="t"/>
-          <a:lstStyle/>
           <a:p>
             <a:pPr algn="l" marL="342900" indent="-342900">
               <a:lnSpc>
@@ -3755,26 +4638,6 @@
               <a:buChar char="•"/>
             </a:pPr>
             <a:r>
-              <a:rPr lang="en-US" sz="1200" b="1" dirty="0">
-                <a:solidFill>
-                  <a:srgbClr val="1A1A1A"/>
-                </a:solidFill>
-                <a:latin typeface="Georgia" pitchFamily="34" charset="0"/>
-                <a:ea typeface="Georgia" pitchFamily="34" charset="-122"/>
-                <a:cs typeface="Georgia" pitchFamily="34" charset="-120"/>
-              </a:rPr>
-              <a:t>The ecological function of sacredness.</a:t>
-            </a:r>
-            <a:pPr algn="l" indent="0" marL="0">
-              <a:lnSpc>
-                <a:spcPts val="1620"/>
-              </a:lnSpc>
-              <a:spcAft>
-                <a:spcPts val="300"/>
-              </a:spcAft>
-              <a:buNone/>
-            </a:pPr>
-            <a:r>
               <a:rPr lang="en-US" sz="1200" dirty="0">
                 <a:solidFill>
                   <a:srgbClr val="1A1A1A"/>
@@ -3783,47 +4646,7 @@
                 <a:ea typeface="Georgia" pitchFamily="34" charset="-122"/>
                 <a:cs typeface="Georgia" pitchFamily="34" charset="-120"/>
               </a:rPr>
-              <a:t> Treating a river as sacred → norms against pollution, against blocking the flow, against over-extraction. </a:t>
-            </a:r>
-            <a:pPr algn="l" indent="0" marL="0">
-              <a:lnSpc>
-                <a:spcPts val="1620"/>
-              </a:lnSpc>
-              <a:spcAft>
-                <a:spcPts val="300"/>
-              </a:spcAft>
-              <a:buNone/>
-            </a:pPr>
-            <a:r>
-              <a:rPr lang="en-US" sz="1200" i="1" dirty="0">
-                <a:solidFill>
-                  <a:srgbClr val="1A1A1A"/>
-                </a:solidFill>
-                <a:latin typeface="Georgia" pitchFamily="34" charset="0"/>
-                <a:ea typeface="Georgia" pitchFamily="34" charset="-122"/>
-                <a:cs typeface="Georgia" pitchFamily="34" charset="-120"/>
-              </a:rPr>
-              <a:t>In principle.</a:t>
-            </a:r>
-            <a:pPr algn="l" indent="0" marL="0">
-              <a:lnSpc>
-                <a:spcPts val="1620"/>
-              </a:lnSpc>
-              <a:spcAft>
-                <a:spcPts val="300"/>
-              </a:spcAft>
-              <a:buNone/>
-            </a:pPr>
-            <a:r>
-              <a:rPr lang="en-US" sz="1200" dirty="0">
-                <a:solidFill>
-                  <a:srgbClr val="1A1A1A"/>
-                </a:solidFill>
-                <a:latin typeface="Georgia" pitchFamily="34" charset="0"/>
-                <a:ea typeface="Georgia" pitchFamily="34" charset="-122"/>
-                <a:cs typeface="Georgia" pitchFamily="34" charset="-120"/>
-              </a:rPr>
-              <a:t> These norms are NOT always honoured today (Ganga, Yamuna are heavily polluted).</a:t>
+              <a:t>Hook: introduce a phenomenon or question that motivates today's concept.</a:t>
             </a:r>
             <a:endParaRPr lang="en-US" sz="1200" dirty="0"/>
           </a:p>
@@ -3831,265 +4654,7 @@
       </p:sp>
       <p:sp>
         <p:nvSpPr>
-          <p:cNvPr id="6" name="Text 4"/>
-          <p:cNvSpPr/>
-          <p:nvPr/>
-        </p:nvSpPr>
-        <p:spPr>
-          <a:xfrm>
-            <a:off x="634901" y="2267396"/>
-            <a:ext cx="8102798" cy="693241"/>
-          </a:xfrm>
-          <a:prstGeom prst="rect">
-            <a:avLst/>
-          </a:prstGeom>
-          <a:noFill/>
-          <a:ln/>
-        </p:spPr>
-        <p:txBody>
-          <a:bodyPr wrap="square" lIns="0" tIns="0" rIns="0" bIns="0" rtlCol="0" anchor="t"/>
-          <a:lstStyle/>
-          <a:p>
-            <a:pPr algn="l" marL="342900" indent="-342900">
-              <a:lnSpc>
-                <a:spcPts val="1620"/>
-              </a:lnSpc>
-              <a:spcAft>
-                <a:spcPts val="300"/>
-              </a:spcAft>
-              <a:buSzPct val="100000"/>
-              <a:buChar char="•"/>
-            </a:pPr>
-            <a:r>
-              <a:rPr lang="en-US" sz="1200" b="1" dirty="0">
-                <a:solidFill>
-                  <a:srgbClr val="1A1A1A"/>
-                </a:solidFill>
-                <a:latin typeface="Georgia" pitchFamily="34" charset="0"/>
-                <a:ea typeface="Georgia" pitchFamily="34" charset="-122"/>
-                <a:cs typeface="Georgia" pitchFamily="34" charset="-120"/>
-              </a:rPr>
-              <a:t>Modern parallel.</a:t>
-            </a:r>
-            <a:pPr algn="l" indent="0" marL="0">
-              <a:lnSpc>
-                <a:spcPts val="1620"/>
-              </a:lnSpc>
-              <a:spcAft>
-                <a:spcPts val="300"/>
-              </a:spcAft>
-              <a:buNone/>
-            </a:pPr>
-            <a:r>
-              <a:rPr lang="en-US" sz="1200" dirty="0">
-                <a:solidFill>
-                  <a:srgbClr val="1A1A1A"/>
-                </a:solidFill>
-                <a:latin typeface="Georgia" pitchFamily="34" charset="0"/>
-                <a:ea typeface="Georgia" pitchFamily="34" charset="-122"/>
-                <a:cs typeface="Georgia" pitchFamily="34" charset="-120"/>
-              </a:rPr>
-              <a:t> Ecuador and Bolivia have laws giving rivers legal personhood. Aotearoa/New Zealand granted legal personhood to the Whanganui River in 2017. India's Ganga and Yamuna were granted similar status briefly in 2017 (court ruling overturned). The legal innovation echoes the older sacred-river framing.</a:t>
-            </a:r>
-            <a:endParaRPr lang="en-US" sz="1200" dirty="0"/>
-          </a:p>
-        </p:txBody>
-      </p:sp>
-      <p:sp>
-        <p:nvSpPr>
-          <p:cNvPr id="7" name="Text 5"/>
-          <p:cNvSpPr/>
-          <p:nvPr/>
-        </p:nvSpPr>
-        <p:spPr>
-          <a:xfrm>
-            <a:off x="634901" y="3062139"/>
-            <a:ext cx="8102798" cy="487561"/>
-          </a:xfrm>
-          <a:prstGeom prst="rect">
-            <a:avLst/>
-          </a:prstGeom>
-          <a:noFill/>
-          <a:ln/>
-        </p:spPr>
-        <p:txBody>
-          <a:bodyPr wrap="square" lIns="0" tIns="0" rIns="0" bIns="0" rtlCol="0" anchor="t"/>
-          <a:lstStyle/>
-          <a:p>
-            <a:pPr algn="l" marL="342900" indent="-342900">
-              <a:lnSpc>
-                <a:spcPts val="1620"/>
-              </a:lnSpc>
-              <a:spcAft>
-                <a:spcPts val="300"/>
-              </a:spcAft>
-              <a:buSzPct val="100000"/>
-              <a:buChar char="•"/>
-            </a:pPr>
-            <a:r>
-              <a:rPr lang="en-US" sz="1200" b="1" dirty="0">
-                <a:solidFill>
-                  <a:srgbClr val="1A1A1A"/>
-                </a:solidFill>
-                <a:latin typeface="Georgia" pitchFamily="34" charset="0"/>
-                <a:ea typeface="Georgia" pitchFamily="34" charset="-122"/>
-                <a:cs typeface="Georgia" pitchFamily="34" charset="-120"/>
-              </a:rPr>
-              <a:t>Source.</a:t>
-            </a:r>
-            <a:pPr algn="l" indent="0" marL="0">
-              <a:lnSpc>
-                <a:spcPts val="1620"/>
-              </a:lnSpc>
-              <a:spcAft>
-                <a:spcPts val="300"/>
-              </a:spcAft>
-              <a:buNone/>
-            </a:pPr>
-            <a:r>
-              <a:rPr lang="en-US" sz="1200" dirty="0">
-                <a:solidFill>
-                  <a:srgbClr val="1A1A1A"/>
-                </a:solidFill>
-                <a:latin typeface="Georgia" pitchFamily="34" charset="0"/>
-                <a:ea typeface="Georgia" pitchFamily="34" charset="-122"/>
-                <a:cs typeface="Georgia" pitchFamily="34" charset="-120"/>
-              </a:rPr>
-              <a:t> Atharva Veda Pṛthivī Sūkta 12.1 — multiple references to flowing waters. Vedic hymns to </a:t>
-            </a:r>
-            <a:pPr algn="l" indent="0" marL="0">
-              <a:lnSpc>
-                <a:spcPts val="1620"/>
-              </a:lnSpc>
-              <a:spcAft>
-                <a:spcPts val="300"/>
-              </a:spcAft>
-              <a:buNone/>
-            </a:pPr>
-            <a:r>
-              <a:rPr lang="en-US" sz="1200" i="1" dirty="0">
-                <a:solidFill>
-                  <a:srgbClr val="1A1A1A"/>
-                </a:solidFill>
-                <a:latin typeface="Georgia" pitchFamily="34" charset="0"/>
-                <a:ea typeface="Georgia" pitchFamily="34" charset="-122"/>
-                <a:cs typeface="Georgia" pitchFamily="34" charset="-120"/>
-              </a:rPr>
-              <a:t>āpaḥ</a:t>
-            </a:r>
-            <a:pPr algn="l" indent="0" marL="0">
-              <a:lnSpc>
-                <a:spcPts val="1620"/>
-              </a:lnSpc>
-              <a:spcAft>
-                <a:spcPts val="300"/>
-              </a:spcAft>
-              <a:buNone/>
-            </a:pPr>
-            <a:r>
-              <a:rPr lang="en-US" sz="1200" dirty="0">
-                <a:solidFill>
-                  <a:srgbClr val="1A1A1A"/>
-                </a:solidFill>
-                <a:latin typeface="Georgia" pitchFamily="34" charset="0"/>
-                <a:ea typeface="Georgia" pitchFamily="34" charset="-122"/>
-                <a:cs typeface="Georgia" pitchFamily="34" charset="-120"/>
-              </a:rPr>
-              <a:t> (waters). Bhāgavata Purāṇa discusses the seven rivers.</a:t>
-            </a:r>
-            <a:endParaRPr lang="en-US" sz="1200" dirty="0"/>
-          </a:p>
-        </p:txBody>
-      </p:sp>
-      <p:sp>
-        <p:nvSpPr>
-          <p:cNvPr id="8" name="Text 6"/>
-          <p:cNvSpPr/>
-          <p:nvPr/>
-        </p:nvSpPr>
-        <p:spPr>
-          <a:xfrm>
-            <a:off x="634901" y="3651200"/>
-            <a:ext cx="8102798" cy="487561"/>
-          </a:xfrm>
-          <a:prstGeom prst="rect">
-            <a:avLst/>
-          </a:prstGeom>
-          <a:noFill/>
-          <a:ln/>
-        </p:spPr>
-        <p:txBody>
-          <a:bodyPr wrap="square" lIns="0" tIns="0" rIns="0" bIns="0" rtlCol="0" anchor="t"/>
-          <a:lstStyle/>
-          <a:p>
-            <a:pPr algn="l" marL="342900" indent="-342900">
-              <a:lnSpc>
-                <a:spcPts val="1620"/>
-              </a:lnSpc>
-              <a:spcAft>
-                <a:spcPts val="300"/>
-              </a:spcAft>
-              <a:buSzPct val="100000"/>
-              <a:buChar char="•"/>
-            </a:pPr>
-            <a:r>
-              <a:rPr lang="en-US" sz="1200" b="1" dirty="0">
-                <a:solidFill>
-                  <a:srgbClr val="1A1A1A"/>
-                </a:solidFill>
-                <a:latin typeface="Georgia" pitchFamily="34" charset="0"/>
-                <a:ea typeface="Georgia" pitchFamily="34" charset="-122"/>
-                <a:cs typeface="Georgia" pitchFamily="34" charset="-120"/>
-              </a:rPr>
-              <a:t>Critical look.</a:t>
-            </a:r>
-            <a:pPr algn="l" indent="0" marL="0">
-              <a:lnSpc>
-                <a:spcPts val="1620"/>
-              </a:lnSpc>
-              <a:spcAft>
-                <a:spcPts val="300"/>
-              </a:spcAft>
-              <a:buNone/>
-            </a:pPr>
-            <a:r>
-              <a:rPr lang="en-US" sz="1200" dirty="0">
-                <a:solidFill>
-                  <a:srgbClr val="1A1A1A"/>
-                </a:solidFill>
-                <a:latin typeface="Georgia" pitchFamily="34" charset="0"/>
-                <a:ea typeface="Georgia" pitchFamily="34" charset="-122"/>
-                <a:cs typeface="Georgia" pitchFamily="34" charset="-120"/>
-              </a:rPr>
-              <a:t> </a:t>
-            </a:r>
-            <a:pPr algn="l" indent="0" marL="0">
-              <a:lnSpc>
-                <a:spcPts val="1620"/>
-              </a:lnSpc>
-              <a:spcAft>
-                <a:spcPts val="300"/>
-              </a:spcAft>
-              <a:buNone/>
-            </a:pPr>
-            <a:r>
-              <a:rPr lang="en-US" sz="1200" i="1" dirty="0">
-                <a:solidFill>
-                  <a:srgbClr val="1A1A1A"/>
-                </a:solidFill>
-                <a:latin typeface="Georgia" pitchFamily="34" charset="0"/>
-                <a:ea typeface="Georgia" pitchFamily="34" charset="-122"/>
-                <a:cs typeface="Georgia" pitchFamily="34" charset="-120"/>
-              </a:rPr>
-              <a:t>"Why are sacred-river norms often violated in practice today? What changes in society have weakened the older protections? Can the framework be revived for the climate crisis?"</a:t>
-            </a:r>
-            <a:endParaRPr lang="en-US" sz="1200" dirty="0"/>
-          </a:p>
-        </p:txBody>
-      </p:sp>
-      <p:sp>
-        <p:nvSpPr>
-          <p:cNvPr id="9" name="Text 7"/>
+          <p:cNvPr id="5" name="Text 3"/>
           <p:cNvSpPr/>
           <p:nvPr/>
         </p:nvSpPr>
@@ -4239,7 +4804,7 @@
                 <a:ea typeface="Times New Roman" pitchFamily="34" charset="-122"/>
                 <a:cs typeface="Times New Roman" pitchFamily="34" charset="-120"/>
               </a:rPr>
-              <a:t>Activity (15 min)</a:t>
+              <a:t>Core (20 min)</a:t>
             </a:r>
             <a:endParaRPr lang="en-US" sz="1800" dirty="0"/>
           </a:p>
@@ -4253,8 +4818,8 @@
         </p:nvSpPr>
         <p:spPr>
           <a:xfrm>
-            <a:off x="406301" y="870942"/>
-            <a:ext cx="8498026" cy="436066"/>
+            <a:off x="634901" y="883593"/>
+            <a:ext cx="8102798" cy="487561"/>
           </a:xfrm>
           <a:prstGeom prst="rect">
             <a:avLst/>
@@ -4266,13 +4831,31 @@
           <a:bodyPr wrap="square" lIns="0" tIns="0" rIns="0" bIns="0" rtlCol="0" anchor="t"/>
           <a:lstStyle/>
           <a:p>
+            <a:pPr algn="l" marL="342900" indent="-342900">
+              <a:lnSpc>
+                <a:spcPts val="1620"/>
+              </a:lnSpc>
+              <a:spcAft>
+                <a:spcPts val="300"/>
+              </a:spcAft>
+              <a:buSzPct val="100000"/>
+              <a:buChar char="•"/>
+            </a:pPr>
+            <a:r>
+              <a:rPr lang="en-US" sz="1200" b="1" dirty="0">
+                <a:solidFill>
+                  <a:srgbClr val="1A1A1A"/>
+                </a:solidFill>
+                <a:latin typeface="Georgia" pitchFamily="34" charset="0"/>
+                <a:ea typeface="Georgia" pitchFamily="34" charset="-122"/>
+                <a:cs typeface="Georgia" pitchFamily="34" charset="-120"/>
+              </a:rPr>
+              <a:t>The Indian river tradition.</a:t>
+            </a:r>
             <a:pPr algn="l" indent="0" marL="0">
               <a:lnSpc>
-                <a:spcPts val="1680"/>
-              </a:lnSpc>
-              <a:spcBef>
-                <a:spcPts val="300"/>
-              </a:spcBef>
+                <a:spcPts val="1620"/>
+              </a:lnSpc>
               <a:spcAft>
                 <a:spcPts val="300"/>
               </a:spcAft>
@@ -4287,15 +4870,12 @@
                 <a:ea typeface="Georgia" pitchFamily="34" charset="-122"/>
                 <a:cs typeface="Georgia" pitchFamily="34" charset="-120"/>
               </a:rPr>
-              <a:t>A scaled version of </a:t>
+              <a:t> </a:t>
             </a:r>
             <a:pPr algn="l" indent="0" marL="0">
               <a:lnSpc>
-                <a:spcPts val="1680"/>
-              </a:lnSpc>
-              <a:spcBef>
-                <a:spcPts val="300"/>
-              </a:spcBef>
+                <a:spcPts val="1620"/>
+              </a:lnSpc>
               <a:spcAft>
                 <a:spcPts val="300"/>
               </a:spcAft>
@@ -4310,15 +4890,12 @@
                 <a:ea typeface="Georgia" pitchFamily="34" charset="-122"/>
                 <a:cs typeface="Georgia" pitchFamily="34" charset="-120"/>
               </a:rPr>
-              <a:t>Sacred Grove (or Local Ecology) Mapping</a:t>
+              <a:t>Gaṅgā, Yamunā, Sarasvatī, Narmadā, Kāverī, Godāvarī, Sindhu</a:t>
             </a:r>
             <a:pPr algn="l" indent="0" marL="0">
               <a:lnSpc>
-                <a:spcPts val="1680"/>
-              </a:lnSpc>
-              <a:spcBef>
-                <a:spcPts val="300"/>
-              </a:spcBef>
+                <a:spcPts val="1620"/>
+              </a:lnSpc>
               <a:spcAft>
                 <a:spcPts val="300"/>
               </a:spcAft>
@@ -4333,15 +4910,58 @@
                 <a:ea typeface="Georgia" pitchFamily="34" charset="-122"/>
                 <a:cs typeface="Georgia" pitchFamily="34" charset="-120"/>
               </a:rPr>
-              <a:t> (see </a:t>
+              <a:t> — seven sacred rivers in Hindu tradition. Each has festival cycles, pilgrimage routes, ritual practices.</a:t>
+            </a:r>
+            <a:endParaRPr lang="en-US" sz="1200" dirty="0"/>
+          </a:p>
+        </p:txBody>
+      </p:sp>
+      <p:sp>
+        <p:nvSpPr>
+          <p:cNvPr id="5" name="Text 3"/>
+          <p:cNvSpPr/>
+          <p:nvPr/>
+        </p:nvSpPr>
+        <p:spPr>
+          <a:xfrm>
+            <a:off x="634901" y="1472654"/>
+            <a:ext cx="8102798" cy="693241"/>
+          </a:xfrm>
+          <a:prstGeom prst="rect">
+            <a:avLst/>
+          </a:prstGeom>
+          <a:noFill/>
+          <a:ln/>
+        </p:spPr>
+        <p:txBody>
+          <a:bodyPr wrap="square" lIns="0" tIns="0" rIns="0" bIns="0" rtlCol="0" anchor="t"/>
+          <a:lstStyle/>
+          <a:p>
+            <a:pPr algn="l" marL="342900" indent="-342900">
+              <a:lnSpc>
+                <a:spcPts val="1620"/>
+              </a:lnSpc>
+              <a:spcAft>
+                <a:spcPts val="300"/>
+              </a:spcAft>
+              <a:buSzPct val="100000"/>
+              <a:buChar char="•"/>
+            </a:pPr>
+            <a:r>
+              <a:rPr lang="en-US" sz="1200" b="1" dirty="0">
+                <a:solidFill>
+                  <a:srgbClr val="1A1A1A"/>
+                </a:solidFill>
+                <a:latin typeface="Georgia" pitchFamily="34" charset="0"/>
+                <a:ea typeface="Georgia" pitchFamily="34" charset="-122"/>
+                <a:cs typeface="Georgia" pitchFamily="34" charset="-120"/>
+              </a:rPr>
+              <a:t>The ecological function of sacredness.</a:t>
             </a:r>
             <a:pPr algn="l" indent="0" marL="0">
               <a:lnSpc>
-                <a:spcPts val="1680"/>
-              </a:lnSpc>
-              <a:spcBef>
-                <a:spcPts val="300"/>
-              </a:spcBef>
+                <a:spcPts val="1620"/>
+              </a:lnSpc>
               <a:spcAft>
                 <a:spcPts val="300"/>
               </a:spcAft>
@@ -4356,15 +4976,32 @@
                 <a:ea typeface="Georgia" pitchFamily="34" charset="-122"/>
                 <a:cs typeface="Georgia" pitchFamily="34" charset="-120"/>
               </a:rPr>
-              <a:t>activities/</a:t>
+              <a:t> Treating a river as sacred → norms against pollution, against blocking the flow, against over-extraction. </a:t>
             </a:r>
             <a:pPr algn="l" indent="0" marL="0">
               <a:lnSpc>
-                <a:spcPts val="1680"/>
-              </a:lnSpc>
-              <a:spcBef>
-                <a:spcPts val="300"/>
-              </a:spcBef>
+                <a:spcPts val="1620"/>
+              </a:lnSpc>
+              <a:spcAft>
+                <a:spcPts val="300"/>
+              </a:spcAft>
+              <a:buNone/>
+            </a:pPr>
+            <a:r>
+              <a:rPr lang="en-US" sz="1200" i="1" dirty="0">
+                <a:solidFill>
+                  <a:srgbClr val="1A1A1A"/>
+                </a:solidFill>
+                <a:latin typeface="Georgia" pitchFamily="34" charset="0"/>
+                <a:ea typeface="Georgia" pitchFamily="34" charset="-122"/>
+                <a:cs typeface="Georgia" pitchFamily="34" charset="-120"/>
+              </a:rPr>
+              <a:t>In principle.</a:t>
+            </a:r>
+            <a:pPr algn="l" indent="0" marL="0">
+              <a:lnSpc>
+                <a:spcPts val="1620"/>
+              </a:lnSpc>
               <a:spcAft>
                 <a:spcPts val="300"/>
               </a:spcAft>
@@ -4379,7 +5016,7 @@
                 <a:ea typeface="Georgia" pitchFamily="34" charset="-122"/>
                 <a:cs typeface="Georgia" pitchFamily="34" charset="-120"/>
               </a:rPr>
-              <a:t>). Today's slice: focus on the part of the activity that reinforces Rivers as Sacred.</a:t>
+              <a:t> These norms are NOT always honoured today (Ganga, Yamuna are heavily polluted).</a:t>
             </a:r>
             <a:endParaRPr lang="en-US" sz="1200" dirty="0"/>
           </a:p>
@@ -4387,7 +5024,7 @@
       </p:sp>
       <p:sp>
         <p:nvSpPr>
-          <p:cNvPr id="5" name="Text 3"/>
+          <p:cNvPr id="6" name="Text 4"/>
           <p:cNvSpPr/>
           <p:nvPr/>
         </p:nvSpPr>
@@ -4537,7 +5174,7 @@
                 <a:ea typeface="Times New Roman" pitchFamily="34" charset="-122"/>
                 <a:cs typeface="Times New Roman" pitchFamily="34" charset="-120"/>
               </a:rPr>
-              <a:t>Wrap-up (5 min)</a:t>
+              <a:t>Core (20 min) (cont.)</a:t>
             </a:r>
             <a:endParaRPr lang="en-US" sz="1800" dirty="0"/>
           </a:p>
@@ -4551,8 +5188,8 @@
         </p:nvSpPr>
         <p:spPr>
           <a:xfrm>
-            <a:off x="406301" y="870942"/>
-            <a:ext cx="8498026" cy="213271"/>
+            <a:off x="634901" y="883593"/>
+            <a:ext cx="8102798" cy="693241"/>
           </a:xfrm>
           <a:prstGeom prst="rect">
             <a:avLst/>
@@ -4564,13 +5201,31 @@
           <a:bodyPr wrap="square" lIns="0" tIns="0" rIns="0" bIns="0" rtlCol="0" anchor="t"/>
           <a:lstStyle/>
           <a:p>
+            <a:pPr algn="l" marL="342900" indent="-342900">
+              <a:lnSpc>
+                <a:spcPts val="1620"/>
+              </a:lnSpc>
+              <a:spcAft>
+                <a:spcPts val="300"/>
+              </a:spcAft>
+              <a:buSzPct val="100000"/>
+              <a:buChar char="•"/>
+            </a:pPr>
+            <a:r>
+              <a:rPr lang="en-US" sz="1200" b="1" dirty="0">
+                <a:solidFill>
+                  <a:srgbClr val="1A1A1A"/>
+                </a:solidFill>
+                <a:latin typeface="Georgia" pitchFamily="34" charset="0"/>
+                <a:ea typeface="Georgia" pitchFamily="34" charset="-122"/>
+                <a:cs typeface="Georgia" pitchFamily="34" charset="-120"/>
+              </a:rPr>
+              <a:t>Modern parallel.</a:t>
+            </a:r>
             <a:pPr algn="l" indent="0" marL="0">
               <a:lnSpc>
-                <a:spcPts val="1680"/>
-              </a:lnSpc>
-              <a:spcBef>
-                <a:spcPts val="300"/>
-              </a:spcBef>
+                <a:spcPts val="1620"/>
+              </a:lnSpc>
               <a:spcAft>
                 <a:spcPts val="300"/>
               </a:spcAft>
@@ -4585,15 +5240,78 @@
                 <a:ea typeface="Georgia" pitchFamily="34" charset="-122"/>
                 <a:cs typeface="Georgia" pitchFamily="34" charset="-120"/>
               </a:rPr>
-              <a:t>– One-sentence exit ticket: </a:t>
+              <a:t> Ecuador and Bolivia have laws giving rivers legal personhood. Aotearoa/New Zealand granted legal personhood to the Whanganui River in 2017. India's Ganga and Yamuna were granted similar status briefly in 2017 (court ruling overturned). The legal innovation echoes the older sacred-river framing.</a:t>
+            </a:r>
+            <a:endParaRPr lang="en-US" sz="1200" dirty="0"/>
+          </a:p>
+        </p:txBody>
+      </p:sp>
+      <p:sp>
+        <p:nvSpPr>
+          <p:cNvPr id="5" name="Text 3"/>
+          <p:cNvSpPr/>
+          <p:nvPr/>
+        </p:nvSpPr>
+        <p:spPr>
+          <a:xfrm>
+            <a:off x="634901" y="1678335"/>
+            <a:ext cx="8102798" cy="487561"/>
+          </a:xfrm>
+          <a:prstGeom prst="rect">
+            <a:avLst/>
+          </a:prstGeom>
+          <a:noFill/>
+          <a:ln/>
+        </p:spPr>
+        <p:txBody>
+          <a:bodyPr wrap="square" lIns="0" tIns="0" rIns="0" bIns="0" rtlCol="0" anchor="t"/>
+          <a:lstStyle/>
+          <a:p>
+            <a:pPr algn="l" marL="342900" indent="-342900">
+              <a:lnSpc>
+                <a:spcPts val="1620"/>
+              </a:lnSpc>
+              <a:spcAft>
+                <a:spcPts val="300"/>
+              </a:spcAft>
+              <a:buSzPct val="100000"/>
+              <a:buChar char="•"/>
+            </a:pPr>
+            <a:r>
+              <a:rPr lang="en-US" sz="1200" b="1" dirty="0">
+                <a:solidFill>
+                  <a:srgbClr val="1A1A1A"/>
+                </a:solidFill>
+                <a:latin typeface="Georgia" pitchFamily="34" charset="0"/>
+                <a:ea typeface="Georgia" pitchFamily="34" charset="-122"/>
+                <a:cs typeface="Georgia" pitchFamily="34" charset="-120"/>
+              </a:rPr>
+              <a:t>Source.</a:t>
             </a:r>
             <a:pPr algn="l" indent="0" marL="0">
               <a:lnSpc>
-                <a:spcPts val="1680"/>
-              </a:lnSpc>
-              <a:spcBef>
-                <a:spcPts val="300"/>
-              </a:spcBef>
+                <a:spcPts val="1620"/>
+              </a:lnSpc>
+              <a:spcAft>
+                <a:spcPts val="300"/>
+              </a:spcAft>
+              <a:buNone/>
+            </a:pPr>
+            <a:r>
+              <a:rPr lang="en-US" sz="1200" dirty="0">
+                <a:solidFill>
+                  <a:srgbClr val="1A1A1A"/>
+                </a:solidFill>
+                <a:latin typeface="Georgia" pitchFamily="34" charset="0"/>
+                <a:ea typeface="Georgia" pitchFamily="34" charset="-122"/>
+                <a:cs typeface="Georgia" pitchFamily="34" charset="-120"/>
+              </a:rPr>
+              <a:t> Atharva Veda Pṛthivī Sūkta 12.1 — multiple references to flowing waters. Vedic hymns to </a:t>
+            </a:r>
+            <a:pPr algn="l" indent="0" marL="0">
+              <a:lnSpc>
+                <a:spcPts val="1620"/>
+              </a:lnSpc>
               <a:spcAft>
                 <a:spcPts val="300"/>
               </a:spcAft>
@@ -4608,15 +5326,12 @@
                 <a:ea typeface="Georgia" pitchFamily="34" charset="-122"/>
                 <a:cs typeface="Georgia" pitchFamily="34" charset="-120"/>
               </a:rPr>
-              <a:t>"What's one thing you learned today?"</a:t>
+              <a:t>āpaḥ</a:t>
             </a:r>
             <a:pPr algn="l" indent="0" marL="0">
               <a:lnSpc>
-                <a:spcPts val="1680"/>
-              </a:lnSpc>
-              <a:spcBef>
-                <a:spcPts val="300"/>
-              </a:spcBef>
+                <a:spcPts val="1620"/>
+              </a:lnSpc>
               <a:spcAft>
                 <a:spcPts val="300"/>
               </a:spcAft>
@@ -4631,7 +5346,7 @@
                 <a:ea typeface="Georgia" pitchFamily="34" charset="-122"/>
                 <a:cs typeface="Georgia" pitchFamily="34" charset="-120"/>
               </a:rPr>
-              <a:t> – Preview tomorrow.</a:t>
+              <a:t> (waters). Bhāgavata Purāṇa discusses the seven rivers.</a:t>
             </a:r>
             <a:endParaRPr lang="en-US" sz="1200" dirty="0"/>
           </a:p>
@@ -4639,7 +5354,7 @@
       </p:sp>
       <p:sp>
         <p:nvSpPr>
-          <p:cNvPr id="5" name="Text 3"/>
+          <p:cNvPr id="6" name="Text 4"/>
           <p:cNvSpPr/>
           <p:nvPr/>
         </p:nvSpPr>
@@ -4789,7 +5504,7 @@
                 <a:ea typeface="Times New Roman" pitchFamily="34" charset="-122"/>
                 <a:cs typeface="Times New Roman" pitchFamily="34" charset="-120"/>
               </a:rPr>
-              <a:t>Homework</a:t>
+              <a:t>Core (20 min) (cont.)</a:t>
             </a:r>
             <a:endParaRPr lang="en-US" sz="1800" dirty="0"/>
           </a:p>
@@ -4803,8 +5518,8 @@
         </p:nvSpPr>
         <p:spPr>
           <a:xfrm>
-            <a:off x="406301" y="870942"/>
-            <a:ext cx="8498026" cy="222796"/>
+            <a:off x="634901" y="883593"/>
+            <a:ext cx="8102798" cy="487561"/>
           </a:xfrm>
           <a:prstGeom prst="rect">
             <a:avLst/>
@@ -4816,13 +5531,31 @@
           <a:bodyPr wrap="square" lIns="0" tIns="0" rIns="0" bIns="0" rtlCol="0" anchor="t"/>
           <a:lstStyle/>
           <a:p>
+            <a:pPr algn="l" marL="342900" indent="-342900">
+              <a:lnSpc>
+                <a:spcPts val="1620"/>
+              </a:lnSpc>
+              <a:spcAft>
+                <a:spcPts val="300"/>
+              </a:spcAft>
+              <a:buSzPct val="100000"/>
+              <a:buChar char="•"/>
+            </a:pPr>
+            <a:r>
+              <a:rPr lang="en-US" sz="1200" b="1" dirty="0">
+                <a:solidFill>
+                  <a:srgbClr val="1A1A1A"/>
+                </a:solidFill>
+                <a:latin typeface="Georgia" pitchFamily="34" charset="0"/>
+                <a:ea typeface="Georgia" pitchFamily="34" charset="-122"/>
+                <a:cs typeface="Georgia" pitchFamily="34" charset="-120"/>
+              </a:rPr>
+              <a:t>Critical look.</a:t>
+            </a:r>
             <a:pPr algn="l" indent="0" marL="0">
               <a:lnSpc>
-                <a:spcPts val="1680"/>
-              </a:lnSpc>
-              <a:spcBef>
-                <a:spcPts val="300"/>
-              </a:spcBef>
+                <a:spcPts val="1620"/>
+              </a:lnSpc>
               <a:spcAft>
                 <a:spcPts val="300"/>
               </a:spcAft>
@@ -4837,53 +5570,27 @@
                 <a:ea typeface="Georgia" pitchFamily="34" charset="-122"/>
                 <a:cs typeface="Georgia" pitchFamily="34" charset="-120"/>
               </a:rPr>
-              <a:t>(See </a:t>
+              <a:t> </a:t>
             </a:r>
             <a:pPr algn="l" indent="0" marL="0">
               <a:lnSpc>
-                <a:spcPts val="1680"/>
-              </a:lnSpc>
-              <a:spcBef>
-                <a:spcPts val="300"/>
-              </a:spcBef>
-              <a:spcAft>
-                <a:spcPts val="300"/>
-              </a:spcAft>
-              <a:buNone/>
-            </a:pPr>
-            <a:r>
-              <a:rPr lang="en-US" sz="1200" dirty="0">
-                <a:solidFill>
-                  <a:srgbClr val="1A1A1A"/>
-                </a:solidFill>
-                <a:latin typeface="Georgia" pitchFamily="34" charset="0"/>
-                <a:ea typeface="Georgia" pitchFamily="34" charset="-122"/>
-                <a:cs typeface="Georgia" pitchFamily="34" charset="-120"/>
-              </a:rPr>
-              <a:t>homework.md</a:t>
-            </a:r>
-            <a:pPr algn="l" indent="0" marL="0">
-              <a:lnSpc>
-                <a:spcPts val="1680"/>
-              </a:lnSpc>
-              <a:spcBef>
-                <a:spcPts val="300"/>
-              </a:spcBef>
-              <a:spcAft>
-                <a:spcPts val="300"/>
-              </a:spcAft>
-              <a:buNone/>
-            </a:pPr>
-            <a:r>
-              <a:rPr lang="en-US" sz="1200" dirty="0">
-                <a:solidFill>
-                  <a:srgbClr val="1A1A1A"/>
-                </a:solidFill>
-                <a:latin typeface="Georgia" pitchFamily="34" charset="0"/>
-                <a:ea typeface="Georgia" pitchFamily="34" charset="-122"/>
-                <a:cs typeface="Georgia" pitchFamily="34" charset="-120"/>
-              </a:rPr>
-              <a:t> for today's task.)</a:t>
+                <a:spcPts val="1620"/>
+              </a:lnSpc>
+              <a:spcAft>
+                <a:spcPts val="300"/>
+              </a:spcAft>
+              <a:buNone/>
+            </a:pPr>
+            <a:r>
+              <a:rPr lang="en-US" sz="1200" i="1" dirty="0">
+                <a:solidFill>
+                  <a:srgbClr val="1A1A1A"/>
+                </a:solidFill>
+                <a:latin typeface="Georgia" pitchFamily="34" charset="0"/>
+                <a:ea typeface="Georgia" pitchFamily="34" charset="-122"/>
+                <a:cs typeface="Georgia" pitchFamily="34" charset="-120"/>
+              </a:rPr>
+              <a:t>"Why are sacred-river norms often violated in practice today? What changes in society have weakened the older protections? Can the framework be revived for the climate crisis?"</a:t>
             </a:r>
             <a:endParaRPr lang="en-US" sz="1200" dirty="0"/>
           </a:p>
